--- a/スクリーンショット_コマンド.pptx
+++ b/スクリーンショット_コマンド.pptx
@@ -6,8 +6,12 @@
   </p:sldMasterIdLst>
   <p:sldIdLst>
     <p:sldId id="256" r:id="rId2"/>
-    <p:sldId id="257" r:id="rId3"/>
-    <p:sldId id="258" r:id="rId4"/>
+    <p:sldId id="258" r:id="rId3"/>
+    <p:sldId id="259" r:id="rId4"/>
+    <p:sldId id="264" r:id="rId5"/>
+    <p:sldId id="265" r:id="rId6"/>
+    <p:sldId id="266" r:id="rId7"/>
+    <p:sldId id="267" r:id="rId8"/>
   </p:sldIdLst>
   <p:sldSz cx="12192000" cy="6858000"/>
   <p:notesSz cx="6858000" cy="9144000"/>
@@ -128,7 +132,7 @@
 <file path=ppt/revisionInfo.xml><?xml version="1.0" encoding="utf-8"?>
 <p1510:revInfo xmlns:a="http://schemas.openxmlformats.org/drawingml/2006/main" xmlns:r="http://schemas.openxmlformats.org/officeDocument/2006/relationships" xmlns:p1510="http://schemas.microsoft.com/office/powerpoint/2015/10/main">
   <p1510:revLst>
-    <p1510:client id="{33850639-B620-4AD3-932A-92749A1EA4CD}" v="3" dt="2026-05-19T05:21:29.845"/>
+    <p1510:client id="{33850639-B620-4AD3-932A-92749A1EA4CD}" v="26" dt="2026-05-19T06:51:57.299"/>
   </p1510:revLst>
 </p1510:revInfo>
 </file>
@@ -137,13 +141,13 @@
 <pc:chgInfo xmlns:a="http://schemas.openxmlformats.org/drawingml/2006/main" xmlns:r="http://schemas.openxmlformats.org/officeDocument/2006/relationships" xmlns:ac="http://schemas.microsoft.com/office/drawing/2013/main/command" xmlns:pc="http://schemas.microsoft.com/office/powerpoint/2013/main/command">
   <pc:docChgLst>
     <pc:chgData name="克利 寳迫" userId="d1807dd80cee582b" providerId="LiveId" clId="{F79782EE-D85D-46E2-B3E9-FAE15D6BED98}"/>
-    <pc:docChg chg="undo custSel addSld modSld">
-      <pc:chgData name="克利 寳迫" userId="d1807dd80cee582b" providerId="LiveId" clId="{F79782EE-D85D-46E2-B3E9-FAE15D6BED98}" dt="2026-05-19T05:22:24.348" v="198" actId="14100"/>
+    <pc:docChg chg="undo redo custSel addSld delSld modSld">
+      <pc:chgData name="克利 寳迫" userId="d1807dd80cee582b" providerId="LiveId" clId="{F79782EE-D85D-46E2-B3E9-FAE15D6BED98}" dt="2026-05-19T07:00:03.743" v="827" actId="732"/>
       <pc:docMkLst>
         <pc:docMk/>
       </pc:docMkLst>
-      <pc:sldChg chg="addSp delSp modSp mod">
-        <pc:chgData name="克利 寳迫" userId="d1807dd80cee582b" providerId="LiveId" clId="{F79782EE-D85D-46E2-B3E9-FAE15D6BED98}" dt="2026-05-19T05:22:24.348" v="198" actId="14100"/>
+      <pc:sldChg chg="addSp delSp modSp mod modShow">
+        <pc:chgData name="克利 寳迫" userId="d1807dd80cee582b" providerId="LiveId" clId="{F79782EE-D85D-46E2-B3E9-FAE15D6BED98}" dt="2026-05-19T06:44:47.065" v="696" actId="729"/>
         <pc:sldMkLst>
           <pc:docMk/>
           <pc:sldMk cId="3572415748" sldId="256"/>
@@ -212,8 +216,8 @@
             <ac:picMk id="13" creationId="{E6F55C61-52F6-FA42-3CBD-AFFC4B79CF27}"/>
           </ac:picMkLst>
         </pc:picChg>
-        <pc:cxnChg chg="add mod">
-          <ac:chgData name="克利 寳迫" userId="d1807dd80cee582b" providerId="LiveId" clId="{F79782EE-D85D-46E2-B3E9-FAE15D6BED98}" dt="2026-05-19T04:58:53.442" v="94" actId="1076"/>
+        <pc:cxnChg chg="add del mod">
+          <ac:chgData name="克利 寳迫" userId="d1807dd80cee582b" providerId="LiveId" clId="{F79782EE-D85D-46E2-B3E9-FAE15D6BED98}" dt="2026-05-19T05:57:48.185" v="329" actId="21"/>
           <ac:cxnSpMkLst>
             <pc:docMk/>
             <pc:sldMk cId="3572415748" sldId="256"/>
@@ -237,8 +241,8 @@
           </ac:cxnSpMkLst>
         </pc:cxnChg>
       </pc:sldChg>
-      <pc:sldChg chg="addSp delSp modSp new mod">
-        <pc:chgData name="克利 寳迫" userId="d1807dd80cee582b" providerId="LiveId" clId="{F79782EE-D85D-46E2-B3E9-FAE15D6BED98}" dt="2026-05-19T05:22:07.794" v="197" actId="14100"/>
+      <pc:sldChg chg="addSp delSp modSp new del mod">
+        <pc:chgData name="克利 寳迫" userId="d1807dd80cee582b" providerId="LiveId" clId="{F79782EE-D85D-46E2-B3E9-FAE15D6BED98}" dt="2026-05-19T05:48:22.407" v="199" actId="47"/>
         <pc:sldMkLst>
           <pc:docMk/>
           <pc:sldMk cId="3471162126" sldId="257"/>
@@ -308,12 +312,1001 @@
           </ac:picMkLst>
         </pc:picChg>
       </pc:sldChg>
-      <pc:sldChg chg="new">
-        <pc:chgData name="克利 寳迫" userId="d1807dd80cee582b" providerId="LiveId" clId="{F79782EE-D85D-46E2-B3E9-FAE15D6BED98}" dt="2026-05-19T05:21:14.605" v="185" actId="680"/>
+      <pc:sldChg chg="addSp delSp modSp new mod modShow">
+        <pc:chgData name="克利 寳迫" userId="d1807dd80cee582b" providerId="LiveId" clId="{F79782EE-D85D-46E2-B3E9-FAE15D6BED98}" dt="2026-05-19T06:44:47.065" v="696" actId="729"/>
         <pc:sldMkLst>
           <pc:docMk/>
           <pc:sldMk cId="977605083" sldId="258"/>
         </pc:sldMkLst>
+        <pc:spChg chg="del">
+          <ac:chgData name="克利 寳迫" userId="d1807dd80cee582b" providerId="LiveId" clId="{F79782EE-D85D-46E2-B3E9-FAE15D6BED98}" dt="2026-05-19T05:48:24.723" v="200" actId="478"/>
+          <ac:spMkLst>
+            <pc:docMk/>
+            <pc:sldMk cId="977605083" sldId="258"/>
+            <ac:spMk id="2" creationId="{D40B049C-D724-E266-73EA-B091A5F84007}"/>
+          </ac:spMkLst>
+        </pc:spChg>
+        <pc:spChg chg="del">
+          <ac:chgData name="克利 寳迫" userId="d1807dd80cee582b" providerId="LiveId" clId="{F79782EE-D85D-46E2-B3E9-FAE15D6BED98}" dt="2026-05-19T05:48:24.723" v="200" actId="478"/>
+          <ac:spMkLst>
+            <pc:docMk/>
+            <pc:sldMk cId="977605083" sldId="258"/>
+            <ac:spMk id="3" creationId="{0E3B5C5D-1A5E-45DB-2488-ADFC616DC2C5}"/>
+          </ac:spMkLst>
+        </pc:spChg>
+        <pc:picChg chg="add mod modCrop">
+          <ac:chgData name="克利 寳迫" userId="d1807dd80cee582b" providerId="LiveId" clId="{F79782EE-D85D-46E2-B3E9-FAE15D6BED98}" dt="2026-05-19T06:37:06.926" v="506" actId="732"/>
+          <ac:picMkLst>
+            <pc:docMk/>
+            <pc:sldMk cId="977605083" sldId="258"/>
+            <ac:picMk id="5" creationId="{D8FEED86-BF64-5BEE-9B31-F2EA7E24D5A5}"/>
+          </ac:picMkLst>
+        </pc:picChg>
+        <pc:picChg chg="add mod modCrop">
+          <ac:chgData name="克利 寳迫" userId="d1807dd80cee582b" providerId="LiveId" clId="{F79782EE-D85D-46E2-B3E9-FAE15D6BED98}" dt="2026-05-19T06:37:00.821" v="504" actId="732"/>
+          <ac:picMkLst>
+            <pc:docMk/>
+            <pc:sldMk cId="977605083" sldId="258"/>
+            <ac:picMk id="7" creationId="{73A8D386-3F58-8A62-7289-74FDA4B7FA12}"/>
+          </ac:picMkLst>
+        </pc:picChg>
+        <pc:picChg chg="add del mod modCrop">
+          <ac:chgData name="克利 寳迫" userId="d1807dd80cee582b" providerId="LiveId" clId="{F79782EE-D85D-46E2-B3E9-FAE15D6BED98}" dt="2026-05-19T06:36:51.889" v="502" actId="732"/>
+          <ac:picMkLst>
+            <pc:docMk/>
+            <pc:sldMk cId="977605083" sldId="258"/>
+            <ac:picMk id="9" creationId="{23005A4A-7D6D-6970-2169-958AB3435B5C}"/>
+          </ac:picMkLst>
+        </pc:picChg>
+        <pc:picChg chg="add mod modCrop">
+          <ac:chgData name="克利 寳迫" userId="d1807dd80cee582b" providerId="LiveId" clId="{F79782EE-D85D-46E2-B3E9-FAE15D6BED98}" dt="2026-05-19T06:36:44.719" v="500" actId="732"/>
+          <ac:picMkLst>
+            <pc:docMk/>
+            <pc:sldMk cId="977605083" sldId="258"/>
+            <ac:picMk id="10" creationId="{799501F3-9A0F-04CB-0B8A-F912AEFE578A}"/>
+          </ac:picMkLst>
+        </pc:picChg>
+        <pc:picChg chg="add mod modCrop">
+          <ac:chgData name="克利 寳迫" userId="d1807dd80cee582b" providerId="LiveId" clId="{F79782EE-D85D-46E2-B3E9-FAE15D6BED98}" dt="2026-05-19T06:36:35.554" v="498" actId="732"/>
+          <ac:picMkLst>
+            <pc:docMk/>
+            <pc:sldMk cId="977605083" sldId="258"/>
+            <ac:picMk id="11" creationId="{57AE720E-C4F9-91F8-6FA7-3FF519B9B6C1}"/>
+          </ac:picMkLst>
+        </pc:picChg>
+        <pc:picChg chg="add mod modCrop">
+          <ac:chgData name="克利 寳迫" userId="d1807dd80cee582b" providerId="LiveId" clId="{F79782EE-D85D-46E2-B3E9-FAE15D6BED98}" dt="2026-05-19T06:36:23.245" v="496" actId="732"/>
+          <ac:picMkLst>
+            <pc:docMk/>
+            <pc:sldMk cId="977605083" sldId="258"/>
+            <ac:picMk id="12" creationId="{7EF528B2-5226-E16C-4FE6-72DBD5492070}"/>
+          </ac:picMkLst>
+        </pc:picChg>
+        <pc:picChg chg="add del mod">
+          <ac:chgData name="克利 寳迫" userId="d1807dd80cee582b" providerId="LiveId" clId="{F79782EE-D85D-46E2-B3E9-FAE15D6BED98}" dt="2026-05-19T06:00:10.944" v="332" actId="478"/>
+          <ac:picMkLst>
+            <pc:docMk/>
+            <pc:sldMk cId="977605083" sldId="258"/>
+            <ac:picMk id="13" creationId="{980BB00D-33A0-22FA-7B2E-0069ADB24A55}"/>
+          </ac:picMkLst>
+        </pc:picChg>
+        <pc:picChg chg="add del mod">
+          <ac:chgData name="克利 寳迫" userId="d1807dd80cee582b" providerId="LiveId" clId="{F79782EE-D85D-46E2-B3E9-FAE15D6BED98}" dt="2026-05-19T05:56:46.409" v="299" actId="22"/>
+          <ac:picMkLst>
+            <pc:docMk/>
+            <pc:sldMk cId="977605083" sldId="258"/>
+            <ac:picMk id="15" creationId="{F98C7539-08E5-E87C-3D6A-7D58835636AC}"/>
+          </ac:picMkLst>
+        </pc:picChg>
+        <pc:picChg chg="add del mod">
+          <ac:chgData name="克利 寳迫" userId="d1807dd80cee582b" providerId="LiveId" clId="{F79782EE-D85D-46E2-B3E9-FAE15D6BED98}" dt="2026-05-19T06:03:05.248" v="365" actId="478"/>
+          <ac:picMkLst>
+            <pc:docMk/>
+            <pc:sldMk cId="977605083" sldId="258"/>
+            <ac:picMk id="18" creationId="{12F0D06C-8EE8-8BD7-F342-8C560454B9C2}"/>
+          </ac:picMkLst>
+        </pc:picChg>
+        <pc:picChg chg="add mod modCrop">
+          <ac:chgData name="克利 寳迫" userId="d1807dd80cee582b" providerId="LiveId" clId="{F79782EE-D85D-46E2-B3E9-FAE15D6BED98}" dt="2026-05-19T06:36:12.250" v="494" actId="732"/>
+          <ac:picMkLst>
+            <pc:docMk/>
+            <pc:sldMk cId="977605083" sldId="258"/>
+            <ac:picMk id="20" creationId="{0F1BFCCF-9EEE-4CD1-4A9D-B8804724090E}"/>
+          </ac:picMkLst>
+        </pc:picChg>
+        <pc:cxnChg chg="add del mod">
+          <ac:chgData name="克利 寳迫" userId="d1807dd80cee582b" providerId="LiveId" clId="{F79782EE-D85D-46E2-B3E9-FAE15D6BED98}" dt="2026-05-19T06:04:20.512" v="385" actId="478"/>
+          <ac:cxnSpMkLst>
+            <pc:docMk/>
+            <pc:sldMk cId="977605083" sldId="258"/>
+            <ac:cxnSpMk id="16" creationId="{462EAEB3-7459-B1AF-629B-CF8F4AED7A4D}"/>
+          </ac:cxnSpMkLst>
+        </pc:cxnChg>
+        <pc:cxnChg chg="add mod">
+          <ac:chgData name="克利 寳迫" userId="d1807dd80cee582b" providerId="LiveId" clId="{F79782EE-D85D-46E2-B3E9-FAE15D6BED98}" dt="2026-05-19T06:35:32.441" v="487" actId="1037"/>
+          <ac:cxnSpMkLst>
+            <pc:docMk/>
+            <pc:sldMk cId="977605083" sldId="258"/>
+            <ac:cxnSpMk id="21" creationId="{90DACBEE-A96B-0A0F-FA95-AD909F8FD013}"/>
+          </ac:cxnSpMkLst>
+        </pc:cxnChg>
+        <pc:cxnChg chg="add mod">
+          <ac:chgData name="克利 寳迫" userId="d1807dd80cee582b" providerId="LiveId" clId="{F79782EE-D85D-46E2-B3E9-FAE15D6BED98}" dt="2026-05-19T06:35:37.665" v="492" actId="1038"/>
+          <ac:cxnSpMkLst>
+            <pc:docMk/>
+            <pc:sldMk cId="977605083" sldId="258"/>
+            <ac:cxnSpMk id="22" creationId="{B6C08575-9687-AAEB-72B6-FDF126B8705E}"/>
+          </ac:cxnSpMkLst>
+        </pc:cxnChg>
+      </pc:sldChg>
+      <pc:sldChg chg="addSp delSp modSp add mod modShow">
+        <pc:chgData name="克利 寳迫" userId="d1807dd80cee582b" providerId="LiveId" clId="{F79782EE-D85D-46E2-B3E9-FAE15D6BED98}" dt="2026-05-19T06:44:47.065" v="696" actId="729"/>
+        <pc:sldMkLst>
+          <pc:docMk/>
+          <pc:sldMk cId="1320575984" sldId="259"/>
+        </pc:sldMkLst>
+        <pc:picChg chg="mod modCrop">
+          <ac:chgData name="克利 寳迫" userId="d1807dd80cee582b" providerId="LiveId" clId="{F79782EE-D85D-46E2-B3E9-FAE15D6BED98}" dt="2026-05-19T06:39:57.847" v="576" actId="732"/>
+          <ac:picMkLst>
+            <pc:docMk/>
+            <pc:sldMk cId="1320575984" sldId="259"/>
+            <ac:picMk id="5" creationId="{9780B836-9134-02D6-207D-9BE298A97078}"/>
+          </ac:picMkLst>
+        </pc:picChg>
+        <pc:picChg chg="mod modCrop">
+          <ac:chgData name="克利 寳迫" userId="d1807dd80cee582b" providerId="LiveId" clId="{F79782EE-D85D-46E2-B3E9-FAE15D6BED98}" dt="2026-05-19T06:42:23.783" v="675" actId="732"/>
+          <ac:picMkLst>
+            <pc:docMk/>
+            <pc:sldMk cId="1320575984" sldId="259"/>
+            <ac:picMk id="7" creationId="{97C3972A-1A21-5F46-C3A7-CD891E2CDD0B}"/>
+          </ac:picMkLst>
+        </pc:picChg>
+        <pc:picChg chg="mod">
+          <ac:chgData name="克利 寳迫" userId="d1807dd80cee582b" providerId="LiveId" clId="{F79782EE-D85D-46E2-B3E9-FAE15D6BED98}" dt="2026-05-19T06:38:13.407" v="524" actId="1076"/>
+          <ac:picMkLst>
+            <pc:docMk/>
+            <pc:sldMk cId="1320575984" sldId="259"/>
+            <ac:picMk id="9" creationId="{9A16DAED-9ADE-F797-BC9C-16C6C3AD9C25}"/>
+          </ac:picMkLst>
+        </pc:picChg>
+        <pc:picChg chg="mod modCrop">
+          <ac:chgData name="克利 寳迫" userId="d1807dd80cee582b" providerId="LiveId" clId="{F79782EE-D85D-46E2-B3E9-FAE15D6BED98}" dt="2026-05-19T06:42:33.359" v="677" actId="732"/>
+          <ac:picMkLst>
+            <pc:docMk/>
+            <pc:sldMk cId="1320575984" sldId="259"/>
+            <ac:picMk id="10" creationId="{4C3F922B-665F-858F-DC34-7CF3C232CEA8}"/>
+          </ac:picMkLst>
+        </pc:picChg>
+        <pc:picChg chg="mod">
+          <ac:chgData name="克利 寳迫" userId="d1807dd80cee582b" providerId="LiveId" clId="{F79782EE-D85D-46E2-B3E9-FAE15D6BED98}" dt="2026-05-19T06:38:13.407" v="524" actId="1076"/>
+          <ac:picMkLst>
+            <pc:docMk/>
+            <pc:sldMk cId="1320575984" sldId="259"/>
+            <ac:picMk id="11" creationId="{6D116406-559E-5D1C-A458-4928B9667BF0}"/>
+          </ac:picMkLst>
+        </pc:picChg>
+        <pc:picChg chg="mod">
+          <ac:chgData name="克利 寳迫" userId="d1807dd80cee582b" providerId="LiveId" clId="{F79782EE-D85D-46E2-B3E9-FAE15D6BED98}" dt="2026-05-19T06:38:13.407" v="524" actId="1076"/>
+          <ac:picMkLst>
+            <pc:docMk/>
+            <pc:sldMk cId="1320575984" sldId="259"/>
+            <ac:picMk id="12" creationId="{29B2D880-D942-6912-002D-41C0D2211BAF}"/>
+          </ac:picMkLst>
+        </pc:picChg>
+        <pc:picChg chg="add mod">
+          <ac:chgData name="克利 寳迫" userId="d1807dd80cee582b" providerId="LiveId" clId="{F79782EE-D85D-46E2-B3E9-FAE15D6BED98}" dt="2026-05-19T06:41:36.483" v="642" actId="571"/>
+          <ac:picMkLst>
+            <pc:docMk/>
+            <pc:sldMk cId="1320575984" sldId="259"/>
+            <ac:picMk id="13" creationId="{7540F835-A492-4889-E426-A625B8007E93}"/>
+          </ac:picMkLst>
+        </pc:picChg>
+        <pc:picChg chg="mod modCrop">
+          <ac:chgData name="克利 寳迫" userId="d1807dd80cee582b" providerId="LiveId" clId="{F79782EE-D85D-46E2-B3E9-FAE15D6BED98}" dt="2026-05-19T06:42:28.442" v="676" actId="732"/>
+          <ac:picMkLst>
+            <pc:docMk/>
+            <pc:sldMk cId="1320575984" sldId="259"/>
+            <ac:picMk id="20" creationId="{68134C8F-4ADD-1626-7AE0-EF612ABBBE19}"/>
+          </ac:picMkLst>
+        </pc:picChg>
+        <pc:cxnChg chg="add mod">
+          <ac:chgData name="克利 寳迫" userId="d1807dd80cee582b" providerId="LiveId" clId="{F79782EE-D85D-46E2-B3E9-FAE15D6BED98}" dt="2026-05-19T06:41:31.229" v="640" actId="1076"/>
+          <ac:cxnSpMkLst>
+            <pc:docMk/>
+            <pc:sldMk cId="1320575984" sldId="259"/>
+            <ac:cxnSpMk id="2" creationId="{BD0CBA6A-43B4-9973-C145-33F0B59F4FF2}"/>
+          </ac:cxnSpMkLst>
+        </pc:cxnChg>
+        <pc:cxnChg chg="add mod">
+          <ac:chgData name="克利 寳迫" userId="d1807dd80cee582b" providerId="LiveId" clId="{F79782EE-D85D-46E2-B3E9-FAE15D6BED98}" dt="2026-05-19T06:40:11.785" v="583" actId="1076"/>
+          <ac:cxnSpMkLst>
+            <pc:docMk/>
+            <pc:sldMk cId="1320575984" sldId="259"/>
+            <ac:cxnSpMk id="6" creationId="{47B3A48C-2C7D-3BB2-64FE-F4C692A1CC75}"/>
+          </ac:cxnSpMkLst>
+        </pc:cxnChg>
+        <pc:cxnChg chg="add mod">
+          <ac:chgData name="克利 寳迫" userId="d1807dd80cee582b" providerId="LiveId" clId="{F79782EE-D85D-46E2-B3E9-FAE15D6BED98}" dt="2026-05-19T06:41:29.482" v="638" actId="571"/>
+          <ac:cxnSpMkLst>
+            <pc:docMk/>
+            <pc:sldMk cId="1320575984" sldId="259"/>
+            <ac:cxnSpMk id="8" creationId="{55520604-7F55-4FDA-15BC-FD5DA63FC32E}"/>
+          </ac:cxnSpMkLst>
+        </pc:cxnChg>
+        <pc:cxnChg chg="add mod">
+          <ac:chgData name="克利 寳迫" userId="d1807dd80cee582b" providerId="LiveId" clId="{F79782EE-D85D-46E2-B3E9-FAE15D6BED98}" dt="2026-05-19T06:42:18.490" v="674" actId="1035"/>
+          <ac:cxnSpMkLst>
+            <pc:docMk/>
+            <pc:sldMk cId="1320575984" sldId="259"/>
+            <ac:cxnSpMk id="14" creationId="{28133543-4F55-4A39-C9A0-3E63B4FA4C9E}"/>
+          </ac:cxnSpMkLst>
+        </pc:cxnChg>
+        <pc:cxnChg chg="del">
+          <ac:chgData name="克利 寳迫" userId="d1807dd80cee582b" providerId="LiveId" clId="{F79782EE-D85D-46E2-B3E9-FAE15D6BED98}" dt="2026-05-19T06:37:14.650" v="508" actId="478"/>
+          <ac:cxnSpMkLst>
+            <pc:docMk/>
+            <pc:sldMk cId="1320575984" sldId="259"/>
+            <ac:cxnSpMk id="21" creationId="{4C470E91-FA53-3F2B-E824-B5CBCDBF2320}"/>
+          </ac:cxnSpMkLst>
+        </pc:cxnChg>
+        <pc:cxnChg chg="del">
+          <ac:chgData name="克利 寳迫" userId="d1807dd80cee582b" providerId="LiveId" clId="{F79782EE-D85D-46E2-B3E9-FAE15D6BED98}" dt="2026-05-19T06:37:14.650" v="508" actId="478"/>
+          <ac:cxnSpMkLst>
+            <pc:docMk/>
+            <pc:sldMk cId="1320575984" sldId="259"/>
+            <ac:cxnSpMk id="22" creationId="{9E1E1BFB-73C1-CDB8-6B3E-70F7229F75C7}"/>
+          </ac:cxnSpMkLst>
+        </pc:cxnChg>
+      </pc:sldChg>
+      <pc:sldChg chg="addSp delSp modSp new del mod">
+        <pc:chgData name="克利 寳迫" userId="d1807dd80cee582b" providerId="LiveId" clId="{F79782EE-D85D-46E2-B3E9-FAE15D6BED98}" dt="2026-05-19T06:34:23.190" v="451" actId="47"/>
+        <pc:sldMkLst>
+          <pc:docMk/>
+          <pc:sldMk cId="3250855851" sldId="259"/>
+        </pc:sldMkLst>
+        <pc:spChg chg="del">
+          <ac:chgData name="克利 寳迫" userId="d1807dd80cee582b" providerId="LiveId" clId="{F79782EE-D85D-46E2-B3E9-FAE15D6BED98}" dt="2026-05-19T05:52:39.399" v="211" actId="478"/>
+          <ac:spMkLst>
+            <pc:docMk/>
+            <pc:sldMk cId="3250855851" sldId="259"/>
+            <ac:spMk id="2" creationId="{F0E87077-00A2-13D6-6CF1-DED428C1A747}"/>
+          </ac:spMkLst>
+        </pc:spChg>
+        <pc:spChg chg="del">
+          <ac:chgData name="克利 寳迫" userId="d1807dd80cee582b" providerId="LiveId" clId="{F79782EE-D85D-46E2-B3E9-FAE15D6BED98}" dt="2026-05-19T05:52:39.399" v="211" actId="478"/>
+          <ac:spMkLst>
+            <pc:docMk/>
+            <pc:sldMk cId="3250855851" sldId="259"/>
+            <ac:spMk id="3" creationId="{1E4CF714-9C99-FBAB-32A3-FBB8D973FCC5}"/>
+          </ac:spMkLst>
+        </pc:spChg>
+        <pc:picChg chg="add del mod">
+          <ac:chgData name="克利 寳迫" userId="d1807dd80cee582b" providerId="LiveId" clId="{F79782EE-D85D-46E2-B3E9-FAE15D6BED98}" dt="2026-05-19T05:53:43.280" v="223" actId="21"/>
+          <ac:picMkLst>
+            <pc:docMk/>
+            <pc:sldMk cId="3250855851" sldId="259"/>
+            <ac:picMk id="5" creationId="{799501F3-9A0F-04CB-0B8A-F912AEFE578A}"/>
+          </ac:picMkLst>
+        </pc:picChg>
+        <pc:picChg chg="add del mod">
+          <ac:chgData name="克利 寳迫" userId="d1807dd80cee582b" providerId="LiveId" clId="{F79782EE-D85D-46E2-B3E9-FAE15D6BED98}" dt="2026-05-19T05:53:43.280" v="223" actId="21"/>
+          <ac:picMkLst>
+            <pc:docMk/>
+            <pc:sldMk cId="3250855851" sldId="259"/>
+            <ac:picMk id="7" creationId="{57AE720E-C4F9-91F8-6FA7-3FF519B9B6C1}"/>
+          </ac:picMkLst>
+        </pc:picChg>
+        <pc:picChg chg="add del mod">
+          <ac:chgData name="克利 寳迫" userId="d1807dd80cee582b" providerId="LiveId" clId="{F79782EE-D85D-46E2-B3E9-FAE15D6BED98}" dt="2026-05-19T05:53:43.280" v="223" actId="21"/>
+          <ac:picMkLst>
+            <pc:docMk/>
+            <pc:sldMk cId="3250855851" sldId="259"/>
+            <ac:picMk id="9" creationId="{7EF528B2-5226-E16C-4FE6-72DBD5492070}"/>
+          </ac:picMkLst>
+        </pc:picChg>
+        <pc:picChg chg="add del mod">
+          <ac:chgData name="克利 寳迫" userId="d1807dd80cee582b" providerId="LiveId" clId="{F79782EE-D85D-46E2-B3E9-FAE15D6BED98}" dt="2026-05-19T05:53:43.280" v="223" actId="21"/>
+          <ac:picMkLst>
+            <pc:docMk/>
+            <pc:sldMk cId="3250855851" sldId="259"/>
+            <ac:picMk id="11" creationId="{980BB00D-33A0-22FA-7B2E-0069ADB24A55}"/>
+          </ac:picMkLst>
+        </pc:picChg>
+      </pc:sldChg>
+      <pc:sldChg chg="delSp modSp add del mod">
+        <pc:chgData name="克利 寳迫" userId="d1807dd80cee582b" providerId="LiveId" clId="{F79782EE-D85D-46E2-B3E9-FAE15D6BED98}" dt="2026-05-19T06:35:15.929" v="480" actId="47"/>
+        <pc:sldMkLst>
+          <pc:docMk/>
+          <pc:sldMk cId="379670954" sldId="260"/>
+        </pc:sldMkLst>
+        <pc:picChg chg="mod">
+          <ac:chgData name="克利 寳迫" userId="d1807dd80cee582b" providerId="LiveId" clId="{F79782EE-D85D-46E2-B3E9-FAE15D6BED98}" dt="2026-05-19T06:35:13.419" v="473" actId="554"/>
+          <ac:picMkLst>
+            <pc:docMk/>
+            <pc:sldMk cId="379670954" sldId="260"/>
+            <ac:picMk id="5" creationId="{11C2A1B5-CB98-A194-0918-D791AE4C5AED}"/>
+          </ac:picMkLst>
+        </pc:picChg>
+        <pc:picChg chg="mod">
+          <ac:chgData name="克利 寳迫" userId="d1807dd80cee582b" providerId="LiveId" clId="{F79782EE-D85D-46E2-B3E9-FAE15D6BED98}" dt="2026-05-19T06:35:13.617" v="474" actId="408"/>
+          <ac:picMkLst>
+            <pc:docMk/>
+            <pc:sldMk cId="379670954" sldId="260"/>
+            <ac:picMk id="7" creationId="{71DED790-00AF-975B-DEBB-7049E0C43D5C}"/>
+          </ac:picMkLst>
+        </pc:picChg>
+        <pc:picChg chg="mod">
+          <ac:chgData name="克利 寳迫" userId="d1807dd80cee582b" providerId="LiveId" clId="{F79782EE-D85D-46E2-B3E9-FAE15D6BED98}" dt="2026-05-19T06:35:14.585" v="479" actId="1076"/>
+          <ac:picMkLst>
+            <pc:docMk/>
+            <pc:sldMk cId="379670954" sldId="260"/>
+            <ac:picMk id="9" creationId="{F805332D-7088-B920-E4D9-55B6DB5BD845}"/>
+          </ac:picMkLst>
+        </pc:picChg>
+        <pc:picChg chg="mod">
+          <ac:chgData name="克利 寳迫" userId="d1807dd80cee582b" providerId="LiveId" clId="{F79782EE-D85D-46E2-B3E9-FAE15D6BED98}" dt="2026-05-19T06:35:14.402" v="478" actId="1076"/>
+          <ac:picMkLst>
+            <pc:docMk/>
+            <pc:sldMk cId="379670954" sldId="260"/>
+            <ac:picMk id="10" creationId="{3C28B77F-A9F4-E77B-E0A1-2588D6A83C2A}"/>
+          </ac:picMkLst>
+        </pc:picChg>
+        <pc:picChg chg="mod">
+          <ac:chgData name="克利 寳迫" userId="d1807dd80cee582b" providerId="LiveId" clId="{F79782EE-D85D-46E2-B3E9-FAE15D6BED98}" dt="2026-05-19T06:35:14.201" v="477" actId="1076"/>
+          <ac:picMkLst>
+            <pc:docMk/>
+            <pc:sldMk cId="379670954" sldId="260"/>
+            <ac:picMk id="11" creationId="{8835DAE1-8229-8BA8-45BB-E22CE89593E6}"/>
+          </ac:picMkLst>
+        </pc:picChg>
+        <pc:picChg chg="mod">
+          <ac:chgData name="克利 寳迫" userId="d1807dd80cee582b" providerId="LiveId" clId="{F79782EE-D85D-46E2-B3E9-FAE15D6BED98}" dt="2026-05-19T06:35:14.002" v="476" actId="1076"/>
+          <ac:picMkLst>
+            <pc:docMk/>
+            <pc:sldMk cId="379670954" sldId="260"/>
+            <ac:picMk id="12" creationId="{E9890206-E9B0-F171-E11A-C21A9289BE1D}"/>
+          </ac:picMkLst>
+        </pc:picChg>
+        <pc:picChg chg="mod">
+          <ac:chgData name="克利 寳迫" userId="d1807dd80cee582b" providerId="LiveId" clId="{F79782EE-D85D-46E2-B3E9-FAE15D6BED98}" dt="2026-05-19T06:35:13.801" v="475" actId="1076"/>
+          <ac:picMkLst>
+            <pc:docMk/>
+            <pc:sldMk cId="379670954" sldId="260"/>
+            <ac:picMk id="20" creationId="{0C26D052-7BF4-4B74-9844-BF7931EA6CF2}"/>
+          </ac:picMkLst>
+        </pc:picChg>
+        <pc:cxnChg chg="del mod">
+          <ac:chgData name="克利 寳迫" userId="d1807dd80cee582b" providerId="LiveId" clId="{F79782EE-D85D-46E2-B3E9-FAE15D6BED98}" dt="2026-05-19T06:34:35.530" v="453" actId="478"/>
+          <ac:cxnSpMkLst>
+            <pc:docMk/>
+            <pc:sldMk cId="379670954" sldId="260"/>
+            <ac:cxnSpMk id="21" creationId="{0EAE25B1-9D31-52E7-B30C-0D689133B1E1}"/>
+          </ac:cxnSpMkLst>
+        </pc:cxnChg>
+        <pc:cxnChg chg="del mod">
+          <ac:chgData name="克利 寳迫" userId="d1807dd80cee582b" providerId="LiveId" clId="{F79782EE-D85D-46E2-B3E9-FAE15D6BED98}" dt="2026-05-19T06:34:35.530" v="453" actId="478"/>
+          <ac:cxnSpMkLst>
+            <pc:docMk/>
+            <pc:sldMk cId="379670954" sldId="260"/>
+            <ac:cxnSpMk id="22" creationId="{BD3D44D4-00F9-305D-B7A0-2355237AB0B6}"/>
+          </ac:cxnSpMkLst>
+        </pc:cxnChg>
+      </pc:sldChg>
+      <pc:sldChg chg="delSp modSp add del mod">
+        <pc:chgData name="克利 寳迫" userId="d1807dd80cee582b" providerId="LiveId" clId="{F79782EE-D85D-46E2-B3E9-FAE15D6BED98}" dt="2026-05-19T06:45:10.557" v="698" actId="47"/>
+        <pc:sldMkLst>
+          <pc:docMk/>
+          <pc:sldMk cId="2161916761" sldId="260"/>
+        </pc:sldMkLst>
+        <pc:picChg chg="del mod">
+          <ac:chgData name="克利 寳迫" userId="d1807dd80cee582b" providerId="LiveId" clId="{F79782EE-D85D-46E2-B3E9-FAE15D6BED98}" dt="2026-05-19T06:44:00.073" v="680" actId="478"/>
+          <ac:picMkLst>
+            <pc:docMk/>
+            <pc:sldMk cId="2161916761" sldId="260"/>
+            <ac:picMk id="5" creationId="{8A621F14-5FC0-048D-6CEA-F3D47CAEA27C}"/>
+          </ac:picMkLst>
+        </pc:picChg>
+        <pc:picChg chg="mod">
+          <ac:chgData name="克利 寳迫" userId="d1807dd80cee582b" providerId="LiveId" clId="{F79782EE-D85D-46E2-B3E9-FAE15D6BED98}" dt="2026-05-19T06:44:03.362" v="681" actId="1076"/>
+          <ac:picMkLst>
+            <pc:docMk/>
+            <pc:sldMk cId="2161916761" sldId="260"/>
+            <ac:picMk id="7" creationId="{067C911B-CE7E-7E38-ADA5-003BD91027DD}"/>
+          </ac:picMkLst>
+        </pc:picChg>
+        <pc:picChg chg="del">
+          <ac:chgData name="克利 寳迫" userId="d1807dd80cee582b" providerId="LiveId" clId="{F79782EE-D85D-46E2-B3E9-FAE15D6BED98}" dt="2026-05-19T06:44:09.375" v="684" actId="478"/>
+          <ac:picMkLst>
+            <pc:docMk/>
+            <pc:sldMk cId="2161916761" sldId="260"/>
+            <ac:picMk id="10" creationId="{20E53CBE-6FBF-064C-844C-44F898CD8114}"/>
+          </ac:picMkLst>
+        </pc:picChg>
+        <pc:picChg chg="del">
+          <ac:chgData name="克利 寳迫" userId="d1807dd80cee582b" providerId="LiveId" clId="{F79782EE-D85D-46E2-B3E9-FAE15D6BED98}" dt="2026-05-19T06:44:09.375" v="684" actId="478"/>
+          <ac:picMkLst>
+            <pc:docMk/>
+            <pc:sldMk cId="2161916761" sldId="260"/>
+            <ac:picMk id="11" creationId="{C223FAF2-2470-619C-04BC-EEEF3863F991}"/>
+          </ac:picMkLst>
+        </pc:picChg>
+        <pc:picChg chg="del">
+          <ac:chgData name="克利 寳迫" userId="d1807dd80cee582b" providerId="LiveId" clId="{F79782EE-D85D-46E2-B3E9-FAE15D6BED98}" dt="2026-05-19T06:44:09.375" v="684" actId="478"/>
+          <ac:picMkLst>
+            <pc:docMk/>
+            <pc:sldMk cId="2161916761" sldId="260"/>
+            <ac:picMk id="12" creationId="{0016B5C6-C7A5-414C-0A57-546C57C7113E}"/>
+          </ac:picMkLst>
+        </pc:picChg>
+        <pc:picChg chg="del">
+          <ac:chgData name="克利 寳迫" userId="d1807dd80cee582b" providerId="LiveId" clId="{F79782EE-D85D-46E2-B3E9-FAE15D6BED98}" dt="2026-05-19T06:44:09.375" v="684" actId="478"/>
+          <ac:picMkLst>
+            <pc:docMk/>
+            <pc:sldMk cId="2161916761" sldId="260"/>
+            <ac:picMk id="20" creationId="{AA7CC80E-6D4A-6FB6-42DF-24A34463A47E}"/>
+          </ac:picMkLst>
+        </pc:picChg>
+        <pc:cxnChg chg="del">
+          <ac:chgData name="克利 寳迫" userId="d1807dd80cee582b" providerId="LiveId" clId="{F79782EE-D85D-46E2-B3E9-FAE15D6BED98}" dt="2026-05-19T06:44:12.921" v="685" actId="478"/>
+          <ac:cxnSpMkLst>
+            <pc:docMk/>
+            <pc:sldMk cId="2161916761" sldId="260"/>
+            <ac:cxnSpMk id="2" creationId="{2F56329A-36D1-C04A-3644-1F63841897AE}"/>
+          </ac:cxnSpMkLst>
+        </pc:cxnChg>
+        <pc:cxnChg chg="del">
+          <ac:chgData name="克利 寳迫" userId="d1807dd80cee582b" providerId="LiveId" clId="{F79782EE-D85D-46E2-B3E9-FAE15D6BED98}" dt="2026-05-19T06:44:12.921" v="685" actId="478"/>
+          <ac:cxnSpMkLst>
+            <pc:docMk/>
+            <pc:sldMk cId="2161916761" sldId="260"/>
+            <ac:cxnSpMk id="6" creationId="{4BE6FE6E-E834-57DB-8839-F41DA8ACF169}"/>
+          </ac:cxnSpMkLst>
+        </pc:cxnChg>
+        <pc:cxnChg chg="del">
+          <ac:chgData name="克利 寳迫" userId="d1807dd80cee582b" providerId="LiveId" clId="{F79782EE-D85D-46E2-B3E9-FAE15D6BED98}" dt="2026-05-19T06:44:12.921" v="685" actId="478"/>
+          <ac:cxnSpMkLst>
+            <pc:docMk/>
+            <pc:sldMk cId="2161916761" sldId="260"/>
+            <ac:cxnSpMk id="14" creationId="{2915E1E5-55B1-F297-132B-23253FB82464}"/>
+          </ac:cxnSpMkLst>
+        </pc:cxnChg>
+      </pc:sldChg>
+      <pc:sldChg chg="delSp modSp add del mod">
+        <pc:chgData name="克利 寳迫" userId="d1807dd80cee582b" providerId="LiveId" clId="{F79782EE-D85D-46E2-B3E9-FAE15D6BED98}" dt="2026-05-19T06:45:10.557" v="698" actId="47"/>
+        <pc:sldMkLst>
+          <pc:docMk/>
+          <pc:sldMk cId="3837756044" sldId="261"/>
+        </pc:sldMkLst>
+        <pc:picChg chg="del mod">
+          <ac:chgData name="克利 寳迫" userId="d1807dd80cee582b" providerId="LiveId" clId="{F79782EE-D85D-46E2-B3E9-FAE15D6BED98}" dt="2026-05-19T06:44:19.672" v="688" actId="478"/>
+          <ac:picMkLst>
+            <pc:docMk/>
+            <pc:sldMk cId="3837756044" sldId="261"/>
+            <ac:picMk id="7" creationId="{E2D69E97-732D-6A4E-0B2F-B595C51728F8}"/>
+          </ac:picMkLst>
+        </pc:picChg>
+        <pc:picChg chg="del mod">
+          <ac:chgData name="克利 寳迫" userId="d1807dd80cee582b" providerId="LiveId" clId="{F79782EE-D85D-46E2-B3E9-FAE15D6BED98}" dt="2026-05-19T06:44:19.672" v="688" actId="478"/>
+          <ac:picMkLst>
+            <pc:docMk/>
+            <pc:sldMk cId="3837756044" sldId="261"/>
+            <ac:picMk id="9" creationId="{23E49BFB-9F68-DFA4-95CB-8251AD903AA6}"/>
+          </ac:picMkLst>
+        </pc:picChg>
+        <pc:picChg chg="mod">
+          <ac:chgData name="克利 寳迫" userId="d1807dd80cee582b" providerId="LiveId" clId="{F79782EE-D85D-46E2-B3E9-FAE15D6BED98}" dt="2026-05-19T06:44:25.667" v="689" actId="1076"/>
+          <ac:picMkLst>
+            <pc:docMk/>
+            <pc:sldMk cId="3837756044" sldId="261"/>
+            <ac:picMk id="10" creationId="{C46A4920-8D37-B69F-CD3F-9CDF3419A65B}"/>
+          </ac:picMkLst>
+        </pc:picChg>
+        <pc:picChg chg="mod">
+          <ac:chgData name="克利 寳迫" userId="d1807dd80cee582b" providerId="LiveId" clId="{F79782EE-D85D-46E2-B3E9-FAE15D6BED98}" dt="2026-05-19T06:44:25.667" v="689" actId="1076"/>
+          <ac:picMkLst>
+            <pc:docMk/>
+            <pc:sldMk cId="3837756044" sldId="261"/>
+            <ac:picMk id="11" creationId="{8AF8C503-950C-79DD-89D9-5FEF760A1E8F}"/>
+          </ac:picMkLst>
+        </pc:picChg>
+        <pc:picChg chg="mod">
+          <ac:chgData name="克利 寳迫" userId="d1807dd80cee582b" providerId="LiveId" clId="{F79782EE-D85D-46E2-B3E9-FAE15D6BED98}" dt="2026-05-19T06:44:25.667" v="689" actId="1076"/>
+          <ac:picMkLst>
+            <pc:docMk/>
+            <pc:sldMk cId="3837756044" sldId="261"/>
+            <ac:picMk id="12" creationId="{09979495-0E7B-3270-62E0-771823996FB4}"/>
+          </ac:picMkLst>
+        </pc:picChg>
+        <pc:picChg chg="del">
+          <ac:chgData name="克利 寳迫" userId="d1807dd80cee582b" providerId="LiveId" clId="{F79782EE-D85D-46E2-B3E9-FAE15D6BED98}" dt="2026-05-19T06:44:19.672" v="688" actId="478"/>
+          <ac:picMkLst>
+            <pc:docMk/>
+            <pc:sldMk cId="3837756044" sldId="261"/>
+            <ac:picMk id="20" creationId="{C7239F85-7BCB-25A3-633D-D9FE6D914A62}"/>
+          </ac:picMkLst>
+        </pc:picChg>
+        <pc:cxnChg chg="del">
+          <ac:chgData name="克利 寳迫" userId="d1807dd80cee582b" providerId="LiveId" clId="{F79782EE-D85D-46E2-B3E9-FAE15D6BED98}" dt="2026-05-19T06:44:17.235" v="686" actId="478"/>
+          <ac:cxnSpMkLst>
+            <pc:docMk/>
+            <pc:sldMk cId="3837756044" sldId="261"/>
+            <ac:cxnSpMk id="2" creationId="{30D94D42-29A3-0904-4B7E-B87A497BCA9B}"/>
+          </ac:cxnSpMkLst>
+        </pc:cxnChg>
+        <pc:cxnChg chg="del">
+          <ac:chgData name="克利 寳迫" userId="d1807dd80cee582b" providerId="LiveId" clId="{F79782EE-D85D-46E2-B3E9-FAE15D6BED98}" dt="2026-05-19T06:44:17.235" v="686" actId="478"/>
+          <ac:cxnSpMkLst>
+            <pc:docMk/>
+            <pc:sldMk cId="3837756044" sldId="261"/>
+            <ac:cxnSpMk id="6" creationId="{7608A235-BB7C-2969-3A8D-0846CD0F2A50}"/>
+          </ac:cxnSpMkLst>
+        </pc:cxnChg>
+        <pc:cxnChg chg="del">
+          <ac:chgData name="克利 寳迫" userId="d1807dd80cee582b" providerId="LiveId" clId="{F79782EE-D85D-46E2-B3E9-FAE15D6BED98}" dt="2026-05-19T06:44:17.235" v="686" actId="478"/>
+          <ac:cxnSpMkLst>
+            <pc:docMk/>
+            <pc:sldMk cId="3837756044" sldId="261"/>
+            <ac:cxnSpMk id="14" creationId="{60D8747D-640C-C4A9-5BFB-148E73F380A1}"/>
+          </ac:cxnSpMkLst>
+        </pc:cxnChg>
+      </pc:sldChg>
+      <pc:sldChg chg="delSp modSp add del mod">
+        <pc:chgData name="克利 寳迫" userId="d1807dd80cee582b" providerId="LiveId" clId="{F79782EE-D85D-46E2-B3E9-FAE15D6BED98}" dt="2026-05-19T06:45:10.557" v="698" actId="47"/>
+        <pc:sldMkLst>
+          <pc:docMk/>
+          <pc:sldMk cId="1680955772" sldId="262"/>
+        </pc:sldMkLst>
+        <pc:picChg chg="del">
+          <ac:chgData name="克利 寳迫" userId="d1807dd80cee582b" providerId="LiveId" clId="{F79782EE-D85D-46E2-B3E9-FAE15D6BED98}" dt="2026-05-19T06:44:33.193" v="691" actId="478"/>
+          <ac:picMkLst>
+            <pc:docMk/>
+            <pc:sldMk cId="1680955772" sldId="262"/>
+            <ac:picMk id="7" creationId="{B3E82A72-874B-71B0-B08E-6A42DBAE8DF5}"/>
+          </ac:picMkLst>
+        </pc:picChg>
+        <pc:picChg chg="del">
+          <ac:chgData name="克利 寳迫" userId="d1807dd80cee582b" providerId="LiveId" clId="{F79782EE-D85D-46E2-B3E9-FAE15D6BED98}" dt="2026-05-19T06:44:33.193" v="691" actId="478"/>
+          <ac:picMkLst>
+            <pc:docMk/>
+            <pc:sldMk cId="1680955772" sldId="262"/>
+            <ac:picMk id="9" creationId="{F883A2C0-0CD2-1413-7730-662DE611641B}"/>
+          </ac:picMkLst>
+        </pc:picChg>
+        <pc:picChg chg="del">
+          <ac:chgData name="克利 寳迫" userId="d1807dd80cee582b" providerId="LiveId" clId="{F79782EE-D85D-46E2-B3E9-FAE15D6BED98}" dt="2026-05-19T06:44:33.193" v="691" actId="478"/>
+          <ac:picMkLst>
+            <pc:docMk/>
+            <pc:sldMk cId="1680955772" sldId="262"/>
+            <ac:picMk id="10" creationId="{D90E123E-D56E-BC4F-C4BE-D6EB8BD0C5CF}"/>
+          </ac:picMkLst>
+        </pc:picChg>
+        <pc:picChg chg="del">
+          <ac:chgData name="克利 寳迫" userId="d1807dd80cee582b" providerId="LiveId" clId="{F79782EE-D85D-46E2-B3E9-FAE15D6BED98}" dt="2026-05-19T06:44:33.193" v="691" actId="478"/>
+          <ac:picMkLst>
+            <pc:docMk/>
+            <pc:sldMk cId="1680955772" sldId="262"/>
+            <ac:picMk id="11" creationId="{FEFB9118-3B48-A495-09E5-7347FA91DD18}"/>
+          </ac:picMkLst>
+        </pc:picChg>
+        <pc:picChg chg="del">
+          <ac:chgData name="克利 寳迫" userId="d1807dd80cee582b" providerId="LiveId" clId="{F79782EE-D85D-46E2-B3E9-FAE15D6BED98}" dt="2026-05-19T06:44:33.193" v="691" actId="478"/>
+          <ac:picMkLst>
+            <pc:docMk/>
+            <pc:sldMk cId="1680955772" sldId="262"/>
+            <ac:picMk id="12" creationId="{4950F03B-E124-A4D9-888A-B0C745E28E2A}"/>
+          </ac:picMkLst>
+        </pc:picChg>
+        <pc:picChg chg="mod">
+          <ac:chgData name="克利 寳迫" userId="d1807dd80cee582b" providerId="LiveId" clId="{F79782EE-D85D-46E2-B3E9-FAE15D6BED98}" dt="2026-05-19T06:44:34.419" v="692" actId="1076"/>
+          <ac:picMkLst>
+            <pc:docMk/>
+            <pc:sldMk cId="1680955772" sldId="262"/>
+            <ac:picMk id="20" creationId="{DF35B250-53D8-B8BB-34D7-A9E4FB73FDF1}"/>
+          </ac:picMkLst>
+        </pc:picChg>
+        <pc:cxnChg chg="del">
+          <ac:chgData name="克利 寳迫" userId="d1807dd80cee582b" providerId="LiveId" clId="{F79782EE-D85D-46E2-B3E9-FAE15D6BED98}" dt="2026-05-19T06:44:30.008" v="690" actId="478"/>
+          <ac:cxnSpMkLst>
+            <pc:docMk/>
+            <pc:sldMk cId="1680955772" sldId="262"/>
+            <ac:cxnSpMk id="2" creationId="{603390FE-5B84-4D16-59F0-1232633A8581}"/>
+          </ac:cxnSpMkLst>
+        </pc:cxnChg>
+        <pc:cxnChg chg="del">
+          <ac:chgData name="克利 寳迫" userId="d1807dd80cee582b" providerId="LiveId" clId="{F79782EE-D85D-46E2-B3E9-FAE15D6BED98}" dt="2026-05-19T06:44:30.008" v="690" actId="478"/>
+          <ac:cxnSpMkLst>
+            <pc:docMk/>
+            <pc:sldMk cId="1680955772" sldId="262"/>
+            <ac:cxnSpMk id="6" creationId="{733F1407-8CC5-6CFE-5B51-3B39113C46BD}"/>
+          </ac:cxnSpMkLst>
+        </pc:cxnChg>
+        <pc:cxnChg chg="del">
+          <ac:chgData name="克利 寳迫" userId="d1807dd80cee582b" providerId="LiveId" clId="{F79782EE-D85D-46E2-B3E9-FAE15D6BED98}" dt="2026-05-19T06:44:30.008" v="690" actId="478"/>
+          <ac:cxnSpMkLst>
+            <pc:docMk/>
+            <pc:sldMk cId="1680955772" sldId="262"/>
+            <ac:cxnSpMk id="14" creationId="{A3126A6E-8253-E762-9CBB-9F9DFB39DC25}"/>
+          </ac:cxnSpMkLst>
+        </pc:cxnChg>
+      </pc:sldChg>
+      <pc:sldChg chg="delSp modSp add del mod">
+        <pc:chgData name="克利 寳迫" userId="d1807dd80cee582b" providerId="LiveId" clId="{F79782EE-D85D-46E2-B3E9-FAE15D6BED98}" dt="2026-05-19T06:45:10.557" v="698" actId="47"/>
+        <pc:sldMkLst>
+          <pc:docMk/>
+          <pc:sldMk cId="2834191502" sldId="263"/>
+        </pc:sldMkLst>
+        <pc:picChg chg="mod">
+          <ac:chgData name="克利 寳迫" userId="d1807dd80cee582b" providerId="LiveId" clId="{F79782EE-D85D-46E2-B3E9-FAE15D6BED98}" dt="2026-05-19T06:44:40.622" v="695" actId="1076"/>
+          <ac:picMkLst>
+            <pc:docMk/>
+            <pc:sldMk cId="2834191502" sldId="263"/>
+            <ac:picMk id="5" creationId="{F37D642E-498D-7475-C342-7A0C4A7BC288}"/>
+          </ac:picMkLst>
+        </pc:picChg>
+        <pc:picChg chg="del">
+          <ac:chgData name="克利 寳迫" userId="d1807dd80cee582b" providerId="LiveId" clId="{F79782EE-D85D-46E2-B3E9-FAE15D6BED98}" dt="2026-05-19T06:44:39.576" v="694" actId="478"/>
+          <ac:picMkLst>
+            <pc:docMk/>
+            <pc:sldMk cId="2834191502" sldId="263"/>
+            <ac:picMk id="7" creationId="{3F7DDC77-A3DD-0C3C-AD5D-A1FC6D9CCA45}"/>
+          </ac:picMkLst>
+        </pc:picChg>
+        <pc:picChg chg="del">
+          <ac:chgData name="克利 寳迫" userId="d1807dd80cee582b" providerId="LiveId" clId="{F79782EE-D85D-46E2-B3E9-FAE15D6BED98}" dt="2026-05-19T06:44:39.576" v="694" actId="478"/>
+          <ac:picMkLst>
+            <pc:docMk/>
+            <pc:sldMk cId="2834191502" sldId="263"/>
+            <ac:picMk id="9" creationId="{DE8BB461-016B-7F91-133D-3FEE86DECEDF}"/>
+          </ac:picMkLst>
+        </pc:picChg>
+        <pc:picChg chg="del">
+          <ac:chgData name="克利 寳迫" userId="d1807dd80cee582b" providerId="LiveId" clId="{F79782EE-D85D-46E2-B3E9-FAE15D6BED98}" dt="2026-05-19T06:44:39.576" v="694" actId="478"/>
+          <ac:picMkLst>
+            <pc:docMk/>
+            <pc:sldMk cId="2834191502" sldId="263"/>
+            <ac:picMk id="10" creationId="{E64E16C5-3689-DCE6-24C4-E3EB50B2D0CC}"/>
+          </ac:picMkLst>
+        </pc:picChg>
+        <pc:picChg chg="del">
+          <ac:chgData name="克利 寳迫" userId="d1807dd80cee582b" providerId="LiveId" clId="{F79782EE-D85D-46E2-B3E9-FAE15D6BED98}" dt="2026-05-19T06:44:39.576" v="694" actId="478"/>
+          <ac:picMkLst>
+            <pc:docMk/>
+            <pc:sldMk cId="2834191502" sldId="263"/>
+            <ac:picMk id="11" creationId="{1CC3FE91-6790-FE6C-CC65-04F2F3461455}"/>
+          </ac:picMkLst>
+        </pc:picChg>
+        <pc:picChg chg="del">
+          <ac:chgData name="克利 寳迫" userId="d1807dd80cee582b" providerId="LiveId" clId="{F79782EE-D85D-46E2-B3E9-FAE15D6BED98}" dt="2026-05-19T06:44:39.576" v="694" actId="478"/>
+          <ac:picMkLst>
+            <pc:docMk/>
+            <pc:sldMk cId="2834191502" sldId="263"/>
+            <ac:picMk id="12" creationId="{A60D0F19-4C78-7939-A88A-7D54879914C7}"/>
+          </ac:picMkLst>
+        </pc:picChg>
+        <pc:picChg chg="del">
+          <ac:chgData name="克利 寳迫" userId="d1807dd80cee582b" providerId="LiveId" clId="{F79782EE-D85D-46E2-B3E9-FAE15D6BED98}" dt="2026-05-19T06:44:39.576" v="694" actId="478"/>
+          <ac:picMkLst>
+            <pc:docMk/>
+            <pc:sldMk cId="2834191502" sldId="263"/>
+            <ac:picMk id="20" creationId="{D5CACAE0-1B8A-BC4D-FCF6-359FF8BB42D4}"/>
+          </ac:picMkLst>
+        </pc:picChg>
+        <pc:cxnChg chg="del">
+          <ac:chgData name="克利 寳迫" userId="d1807dd80cee582b" providerId="LiveId" clId="{F79782EE-D85D-46E2-B3E9-FAE15D6BED98}" dt="2026-05-19T06:44:39.576" v="694" actId="478"/>
+          <ac:cxnSpMkLst>
+            <pc:docMk/>
+            <pc:sldMk cId="2834191502" sldId="263"/>
+            <ac:cxnSpMk id="2" creationId="{756FE7B7-C031-4569-B2A6-E1A3C736500B}"/>
+          </ac:cxnSpMkLst>
+        </pc:cxnChg>
+        <pc:cxnChg chg="del">
+          <ac:chgData name="克利 寳迫" userId="d1807dd80cee582b" providerId="LiveId" clId="{F79782EE-D85D-46E2-B3E9-FAE15D6BED98}" dt="2026-05-19T06:44:39.576" v="694" actId="478"/>
+          <ac:cxnSpMkLst>
+            <pc:docMk/>
+            <pc:sldMk cId="2834191502" sldId="263"/>
+            <ac:cxnSpMk id="6" creationId="{4871EB35-B2A4-771D-FD4E-5232A58CD751}"/>
+          </ac:cxnSpMkLst>
+        </pc:cxnChg>
+        <pc:cxnChg chg="del">
+          <ac:chgData name="克利 寳迫" userId="d1807dd80cee582b" providerId="LiveId" clId="{F79782EE-D85D-46E2-B3E9-FAE15D6BED98}" dt="2026-05-19T06:44:39.576" v="694" actId="478"/>
+          <ac:cxnSpMkLst>
+            <pc:docMk/>
+            <pc:sldMk cId="2834191502" sldId="263"/>
+            <ac:cxnSpMk id="14" creationId="{043C55D4-C4E8-44D5-864D-4F1A93785D38}"/>
+          </ac:cxnSpMkLst>
+        </pc:cxnChg>
+      </pc:sldChg>
+      <pc:sldChg chg="delSp modSp add mod modShow">
+        <pc:chgData name="克利 寳迫" userId="d1807dd80cee582b" providerId="LiveId" clId="{F79782EE-D85D-46E2-B3E9-FAE15D6BED98}" dt="2026-05-19T06:45:57.198" v="708" actId="1076"/>
+        <pc:sldMkLst>
+          <pc:docMk/>
+          <pc:sldMk cId="1018347364" sldId="264"/>
+        </pc:sldMkLst>
+        <pc:picChg chg="mod">
+          <ac:chgData name="克利 寳迫" userId="d1807dd80cee582b" providerId="LiveId" clId="{F79782EE-D85D-46E2-B3E9-FAE15D6BED98}" dt="2026-05-19T06:45:57.198" v="708" actId="1076"/>
+          <ac:picMkLst>
+            <pc:docMk/>
+            <pc:sldMk cId="1018347364" sldId="264"/>
+            <ac:picMk id="5" creationId="{5B64073B-9704-5A39-5B05-D13EA9520737}"/>
+          </ac:picMkLst>
+        </pc:picChg>
+        <pc:picChg chg="del mod">
+          <ac:chgData name="克利 寳迫" userId="d1807dd80cee582b" providerId="LiveId" clId="{F79782EE-D85D-46E2-B3E9-FAE15D6BED98}" dt="2026-05-19T06:45:55.744" v="707" actId="478"/>
+          <ac:picMkLst>
+            <pc:docMk/>
+            <pc:sldMk cId="1018347364" sldId="264"/>
+            <ac:picMk id="7" creationId="{6EC74E72-E829-74D6-D7CD-8DBED9FA6C07}"/>
+          </ac:picMkLst>
+        </pc:picChg>
+        <pc:picChg chg="del mod">
+          <ac:chgData name="克利 寳迫" userId="d1807dd80cee582b" providerId="LiveId" clId="{F79782EE-D85D-46E2-B3E9-FAE15D6BED98}" dt="2026-05-19T06:45:55.744" v="707" actId="478"/>
+          <ac:picMkLst>
+            <pc:docMk/>
+            <pc:sldMk cId="1018347364" sldId="264"/>
+            <ac:picMk id="9" creationId="{441A727D-B48F-B2DE-952B-7C3FB005D9C7}"/>
+          </ac:picMkLst>
+        </pc:picChg>
+        <pc:picChg chg="del mod">
+          <ac:chgData name="克利 寳迫" userId="d1807dd80cee582b" providerId="LiveId" clId="{F79782EE-D85D-46E2-B3E9-FAE15D6BED98}" dt="2026-05-19T06:45:55.744" v="707" actId="478"/>
+          <ac:picMkLst>
+            <pc:docMk/>
+            <pc:sldMk cId="1018347364" sldId="264"/>
+            <ac:picMk id="10" creationId="{E01C21F1-8F50-5009-AFD3-BC648B1295CA}"/>
+          </ac:picMkLst>
+        </pc:picChg>
+        <pc:picChg chg="del mod">
+          <ac:chgData name="克利 寳迫" userId="d1807dd80cee582b" providerId="LiveId" clId="{F79782EE-D85D-46E2-B3E9-FAE15D6BED98}" dt="2026-05-19T06:45:55.744" v="707" actId="478"/>
+          <ac:picMkLst>
+            <pc:docMk/>
+            <pc:sldMk cId="1018347364" sldId="264"/>
+            <ac:picMk id="11" creationId="{A9327635-C220-D35B-0F91-15B7C36C0EBE}"/>
+          </ac:picMkLst>
+        </pc:picChg>
+        <pc:picChg chg="del mod">
+          <ac:chgData name="克利 寳迫" userId="d1807dd80cee582b" providerId="LiveId" clId="{F79782EE-D85D-46E2-B3E9-FAE15D6BED98}" dt="2026-05-19T06:45:55.744" v="707" actId="478"/>
+          <ac:picMkLst>
+            <pc:docMk/>
+            <pc:sldMk cId="1018347364" sldId="264"/>
+            <ac:picMk id="12" creationId="{BFA2582B-3B8F-A185-4934-5521596A042E}"/>
+          </ac:picMkLst>
+        </pc:picChg>
+        <pc:picChg chg="del mod">
+          <ac:chgData name="克利 寳迫" userId="d1807dd80cee582b" providerId="LiveId" clId="{F79782EE-D85D-46E2-B3E9-FAE15D6BED98}" dt="2026-05-19T06:45:55.744" v="707" actId="478"/>
+          <ac:picMkLst>
+            <pc:docMk/>
+            <pc:sldMk cId="1018347364" sldId="264"/>
+            <ac:picMk id="20" creationId="{8F51BCD8-C846-82D0-35D1-1B446747B490}"/>
+          </ac:picMkLst>
+        </pc:picChg>
+        <pc:cxnChg chg="del">
+          <ac:chgData name="克利 寳迫" userId="d1807dd80cee582b" providerId="LiveId" clId="{F79782EE-D85D-46E2-B3E9-FAE15D6BED98}" dt="2026-05-19T06:45:20.584" v="699" actId="478"/>
+          <ac:cxnSpMkLst>
+            <pc:docMk/>
+            <pc:sldMk cId="1018347364" sldId="264"/>
+            <ac:cxnSpMk id="2" creationId="{FC6C4FD7-D970-9056-4C9D-21508CC3F8AE}"/>
+          </ac:cxnSpMkLst>
+        </pc:cxnChg>
+        <pc:cxnChg chg="del">
+          <ac:chgData name="克利 寳迫" userId="d1807dd80cee582b" providerId="LiveId" clId="{F79782EE-D85D-46E2-B3E9-FAE15D6BED98}" dt="2026-05-19T06:45:20.584" v="699" actId="478"/>
+          <ac:cxnSpMkLst>
+            <pc:docMk/>
+            <pc:sldMk cId="1018347364" sldId="264"/>
+            <ac:cxnSpMk id="6" creationId="{869EB0C8-DC03-F229-36C9-41BB77FD345D}"/>
+          </ac:cxnSpMkLst>
+        </pc:cxnChg>
+        <pc:cxnChg chg="del">
+          <ac:chgData name="克利 寳迫" userId="d1807dd80cee582b" providerId="LiveId" clId="{F79782EE-D85D-46E2-B3E9-FAE15D6BED98}" dt="2026-05-19T06:45:20.584" v="699" actId="478"/>
+          <ac:cxnSpMkLst>
+            <pc:docMk/>
+            <pc:sldMk cId="1018347364" sldId="264"/>
+            <ac:cxnSpMk id="14" creationId="{C98C701F-FF30-7917-8336-5F806D43B551}"/>
+          </ac:cxnSpMkLst>
+        </pc:cxnChg>
+      </pc:sldChg>
+      <pc:sldChg chg="addSp delSp modSp add mod modShow">
+        <pc:chgData name="克利 寳迫" userId="d1807dd80cee582b" providerId="LiveId" clId="{F79782EE-D85D-46E2-B3E9-FAE15D6BED98}" dt="2026-05-19T07:00:03.743" v="827" actId="732"/>
+        <pc:sldMkLst>
+          <pc:docMk/>
+          <pc:sldMk cId="4224806389" sldId="265"/>
+        </pc:sldMkLst>
+        <pc:grpChg chg="add mod">
+          <ac:chgData name="克利 寳迫" userId="d1807dd80cee582b" providerId="LiveId" clId="{F79782EE-D85D-46E2-B3E9-FAE15D6BED98}" dt="2026-05-19T06:59:57.787" v="826" actId="1076"/>
+          <ac:grpSpMkLst>
+            <pc:docMk/>
+            <pc:sldMk cId="4224806389" sldId="265"/>
+            <ac:grpSpMk id="2" creationId="{2DEBD4A9-657D-D0F6-1ACD-DB09B84986C3}"/>
+          </ac:grpSpMkLst>
+        </pc:grpChg>
+        <pc:picChg chg="del">
+          <ac:chgData name="克利 寳迫" userId="d1807dd80cee582b" providerId="LiveId" clId="{F79782EE-D85D-46E2-B3E9-FAE15D6BED98}" dt="2026-05-19T06:46:02.136" v="709" actId="478"/>
+          <ac:picMkLst>
+            <pc:docMk/>
+            <pc:sldMk cId="4224806389" sldId="265"/>
+            <ac:picMk id="5" creationId="{E2C57AFA-7874-8333-2DCC-42CD783FA63F}"/>
+          </ac:picMkLst>
+        </pc:picChg>
+        <pc:picChg chg="mod modCrop">
+          <ac:chgData name="克利 寳迫" userId="d1807dd80cee582b" providerId="LiveId" clId="{F79782EE-D85D-46E2-B3E9-FAE15D6BED98}" dt="2026-05-19T07:00:03.743" v="827" actId="732"/>
+          <ac:picMkLst>
+            <pc:docMk/>
+            <pc:sldMk cId="4224806389" sldId="265"/>
+            <ac:picMk id="7" creationId="{C26839ED-5D36-F59F-E053-464D232C76C4}"/>
+          </ac:picMkLst>
+        </pc:picChg>
+        <pc:picChg chg="mod modCrop">
+          <ac:chgData name="克利 寳迫" userId="d1807dd80cee582b" providerId="LiveId" clId="{F79782EE-D85D-46E2-B3E9-FAE15D6BED98}" dt="2026-05-19T06:59:55.103" v="825" actId="732"/>
+          <ac:picMkLst>
+            <pc:docMk/>
+            <pc:sldMk cId="4224806389" sldId="265"/>
+            <ac:picMk id="9" creationId="{7C75AFD9-2FAE-4ACE-AEC9-F61B1065A6F3}"/>
+          </ac:picMkLst>
+        </pc:picChg>
+        <pc:picChg chg="del">
+          <ac:chgData name="克利 寳迫" userId="d1807dd80cee582b" providerId="LiveId" clId="{F79782EE-D85D-46E2-B3E9-FAE15D6BED98}" dt="2026-05-19T06:46:02.136" v="709" actId="478"/>
+          <ac:picMkLst>
+            <pc:docMk/>
+            <pc:sldMk cId="4224806389" sldId="265"/>
+            <ac:picMk id="10" creationId="{7B7F2BA0-CC64-9DFE-DFA8-8438833A555A}"/>
+          </ac:picMkLst>
+        </pc:picChg>
+        <pc:picChg chg="del">
+          <ac:chgData name="克利 寳迫" userId="d1807dd80cee582b" providerId="LiveId" clId="{F79782EE-D85D-46E2-B3E9-FAE15D6BED98}" dt="2026-05-19T06:46:02.136" v="709" actId="478"/>
+          <ac:picMkLst>
+            <pc:docMk/>
+            <pc:sldMk cId="4224806389" sldId="265"/>
+            <ac:picMk id="11" creationId="{C6AB190A-C10C-E280-A74D-AD6A7FB5F9DB}"/>
+          </ac:picMkLst>
+        </pc:picChg>
+        <pc:picChg chg="del">
+          <ac:chgData name="克利 寳迫" userId="d1807dd80cee582b" providerId="LiveId" clId="{F79782EE-D85D-46E2-B3E9-FAE15D6BED98}" dt="2026-05-19T06:46:02.136" v="709" actId="478"/>
+          <ac:picMkLst>
+            <pc:docMk/>
+            <pc:sldMk cId="4224806389" sldId="265"/>
+            <ac:picMk id="12" creationId="{7B4EE2A7-A4CF-1128-52FF-41CAFDF10A3A}"/>
+          </ac:picMkLst>
+        </pc:picChg>
+        <pc:picChg chg="del">
+          <ac:chgData name="克利 寳迫" userId="d1807dd80cee582b" providerId="LiveId" clId="{F79782EE-D85D-46E2-B3E9-FAE15D6BED98}" dt="2026-05-19T06:46:02.136" v="709" actId="478"/>
+          <ac:picMkLst>
+            <pc:docMk/>
+            <pc:sldMk cId="4224806389" sldId="265"/>
+            <ac:picMk id="20" creationId="{9EC9D85B-1615-B6C9-04BC-94342A02FB6C}"/>
+          </ac:picMkLst>
+        </pc:picChg>
+      </pc:sldChg>
+      <pc:sldChg chg="addSp delSp modSp add mod modShow">
+        <pc:chgData name="克利 寳迫" userId="d1807dd80cee582b" providerId="LiveId" clId="{F79782EE-D85D-46E2-B3E9-FAE15D6BED98}" dt="2026-05-19T06:59:43.199" v="824" actId="732"/>
+        <pc:sldMkLst>
+          <pc:docMk/>
+          <pc:sldMk cId="1945534796" sldId="266"/>
+        </pc:sldMkLst>
+        <pc:grpChg chg="add mod">
+          <ac:chgData name="克利 寳迫" userId="d1807dd80cee582b" providerId="LiveId" clId="{F79782EE-D85D-46E2-B3E9-FAE15D6BED98}" dt="2026-05-19T06:51:57.298" v="821" actId="164"/>
+          <ac:grpSpMkLst>
+            <pc:docMk/>
+            <pc:sldMk cId="1945534796" sldId="266"/>
+            <ac:grpSpMk id="2" creationId="{F8C9C589-2195-396F-E414-EB28E8948B18}"/>
+          </ac:grpSpMkLst>
+        </pc:grpChg>
+        <pc:picChg chg="del">
+          <ac:chgData name="克利 寳迫" userId="d1807dd80cee582b" providerId="LiveId" clId="{F79782EE-D85D-46E2-B3E9-FAE15D6BED98}" dt="2026-05-19T06:46:08.272" v="713" actId="478"/>
+          <ac:picMkLst>
+            <pc:docMk/>
+            <pc:sldMk cId="1945534796" sldId="266"/>
+            <ac:picMk id="5" creationId="{58D16865-AB6B-BBFB-DAD4-A8606AC3746D}"/>
+          </ac:picMkLst>
+        </pc:picChg>
+        <pc:picChg chg="del">
+          <ac:chgData name="克利 寳迫" userId="d1807dd80cee582b" providerId="LiveId" clId="{F79782EE-D85D-46E2-B3E9-FAE15D6BED98}" dt="2026-05-19T06:46:08.272" v="713" actId="478"/>
+          <ac:picMkLst>
+            <pc:docMk/>
+            <pc:sldMk cId="1945534796" sldId="266"/>
+            <ac:picMk id="7" creationId="{0E3A31D3-98D4-4FCB-C396-7B23C316DEAE}"/>
+          </ac:picMkLst>
+        </pc:picChg>
+        <pc:picChg chg="del">
+          <ac:chgData name="克利 寳迫" userId="d1807dd80cee582b" providerId="LiveId" clId="{F79782EE-D85D-46E2-B3E9-FAE15D6BED98}" dt="2026-05-19T06:46:08.272" v="713" actId="478"/>
+          <ac:picMkLst>
+            <pc:docMk/>
+            <pc:sldMk cId="1945534796" sldId="266"/>
+            <ac:picMk id="9" creationId="{D691AD0F-8BB0-1DDC-BEB9-6F46890173FB}"/>
+          </ac:picMkLst>
+        </pc:picChg>
+        <pc:picChg chg="mod">
+          <ac:chgData name="克利 寳迫" userId="d1807dd80cee582b" providerId="LiveId" clId="{F79782EE-D85D-46E2-B3E9-FAE15D6BED98}" dt="2026-05-19T06:51:57.298" v="821" actId="164"/>
+          <ac:picMkLst>
+            <pc:docMk/>
+            <pc:sldMk cId="1945534796" sldId="266"/>
+            <ac:picMk id="10" creationId="{75F8B4B3-D22E-D633-8B73-1563A909B4CE}"/>
+          </ac:picMkLst>
+        </pc:picChg>
+        <pc:picChg chg="mod modCrop">
+          <ac:chgData name="克利 寳迫" userId="d1807dd80cee582b" providerId="LiveId" clId="{F79782EE-D85D-46E2-B3E9-FAE15D6BED98}" dt="2026-05-19T06:51:57.298" v="821" actId="164"/>
+          <ac:picMkLst>
+            <pc:docMk/>
+            <pc:sldMk cId="1945534796" sldId="266"/>
+            <ac:picMk id="11" creationId="{E22A94D7-A088-04D1-3944-088F841EB7E7}"/>
+          </ac:picMkLst>
+        </pc:picChg>
+        <pc:picChg chg="mod modCrop">
+          <ac:chgData name="克利 寳迫" userId="d1807dd80cee582b" providerId="LiveId" clId="{F79782EE-D85D-46E2-B3E9-FAE15D6BED98}" dt="2026-05-19T06:59:43.199" v="824" actId="732"/>
+          <ac:picMkLst>
+            <pc:docMk/>
+            <pc:sldMk cId="1945534796" sldId="266"/>
+            <ac:picMk id="12" creationId="{BC4A45AC-C517-8777-BDF9-D02E35E5C76C}"/>
+          </ac:picMkLst>
+        </pc:picChg>
+        <pc:picChg chg="del">
+          <ac:chgData name="克利 寳迫" userId="d1807dd80cee582b" providerId="LiveId" clId="{F79782EE-D85D-46E2-B3E9-FAE15D6BED98}" dt="2026-05-19T06:46:09.608" v="714" actId="478"/>
+          <ac:picMkLst>
+            <pc:docMk/>
+            <pc:sldMk cId="1945534796" sldId="266"/>
+            <ac:picMk id="20" creationId="{D7CB0A03-5D82-A339-092F-1301E707F455}"/>
+          </ac:picMkLst>
+        </pc:picChg>
+      </pc:sldChg>
+      <pc:sldChg chg="delSp modSp add mod modShow">
+        <pc:chgData name="克利 寳迫" userId="d1807dd80cee582b" providerId="LiveId" clId="{F79782EE-D85D-46E2-B3E9-FAE15D6BED98}" dt="2026-05-19T06:46:30.987" v="720" actId="732"/>
+        <pc:sldMkLst>
+          <pc:docMk/>
+          <pc:sldMk cId="1107477807" sldId="267"/>
+        </pc:sldMkLst>
+        <pc:picChg chg="del">
+          <ac:chgData name="克利 寳迫" userId="d1807dd80cee582b" providerId="LiveId" clId="{F79782EE-D85D-46E2-B3E9-FAE15D6BED98}" dt="2026-05-19T06:46:15.714" v="716" actId="478"/>
+          <ac:picMkLst>
+            <pc:docMk/>
+            <pc:sldMk cId="1107477807" sldId="267"/>
+            <ac:picMk id="5" creationId="{C7255AC9-F2EE-EDCC-9DBA-9CBEFE982F0E}"/>
+          </ac:picMkLst>
+        </pc:picChg>
+        <pc:picChg chg="del">
+          <ac:chgData name="克利 寳迫" userId="d1807dd80cee582b" providerId="LiveId" clId="{F79782EE-D85D-46E2-B3E9-FAE15D6BED98}" dt="2026-05-19T06:46:15.714" v="716" actId="478"/>
+          <ac:picMkLst>
+            <pc:docMk/>
+            <pc:sldMk cId="1107477807" sldId="267"/>
+            <ac:picMk id="7" creationId="{E9502A40-E02E-9AFF-A9D0-104EA42FECC3}"/>
+          </ac:picMkLst>
+        </pc:picChg>
+        <pc:picChg chg="del">
+          <ac:chgData name="克利 寳迫" userId="d1807dd80cee582b" providerId="LiveId" clId="{F79782EE-D85D-46E2-B3E9-FAE15D6BED98}" dt="2026-05-19T06:46:15.714" v="716" actId="478"/>
+          <ac:picMkLst>
+            <pc:docMk/>
+            <pc:sldMk cId="1107477807" sldId="267"/>
+            <ac:picMk id="9" creationId="{4A918624-9044-0B0D-5721-58D9F16EA1AC}"/>
+          </ac:picMkLst>
+        </pc:picChg>
+        <pc:picChg chg="del">
+          <ac:chgData name="克利 寳迫" userId="d1807dd80cee582b" providerId="LiveId" clId="{F79782EE-D85D-46E2-B3E9-FAE15D6BED98}" dt="2026-05-19T06:46:15.714" v="716" actId="478"/>
+          <ac:picMkLst>
+            <pc:docMk/>
+            <pc:sldMk cId="1107477807" sldId="267"/>
+            <ac:picMk id="10" creationId="{F93ACCB6-0BAC-C0F0-760D-FD41339FD190}"/>
+          </ac:picMkLst>
+        </pc:picChg>
+        <pc:picChg chg="del">
+          <ac:chgData name="克利 寳迫" userId="d1807dd80cee582b" providerId="LiveId" clId="{F79782EE-D85D-46E2-B3E9-FAE15D6BED98}" dt="2026-05-19T06:46:15.714" v="716" actId="478"/>
+          <ac:picMkLst>
+            <pc:docMk/>
+            <pc:sldMk cId="1107477807" sldId="267"/>
+            <ac:picMk id="11" creationId="{840904F0-370E-4D6E-716A-DFD4A65856AD}"/>
+          </ac:picMkLst>
+        </pc:picChg>
+        <pc:picChg chg="del">
+          <ac:chgData name="克利 寳迫" userId="d1807dd80cee582b" providerId="LiveId" clId="{F79782EE-D85D-46E2-B3E9-FAE15D6BED98}" dt="2026-05-19T06:46:15.714" v="716" actId="478"/>
+          <ac:picMkLst>
+            <pc:docMk/>
+            <pc:sldMk cId="1107477807" sldId="267"/>
+            <ac:picMk id="12" creationId="{CF6E2EE2-7090-BE14-1FBE-2B09E3E71B31}"/>
+          </ac:picMkLst>
+        </pc:picChg>
+        <pc:picChg chg="mod modCrop">
+          <ac:chgData name="克利 寳迫" userId="d1807dd80cee582b" providerId="LiveId" clId="{F79782EE-D85D-46E2-B3E9-FAE15D6BED98}" dt="2026-05-19T06:46:30.987" v="720" actId="732"/>
+          <ac:picMkLst>
+            <pc:docMk/>
+            <pc:sldMk cId="1107477807" sldId="267"/>
+            <ac:picMk id="20" creationId="{EE9E9111-C76F-3825-1360-ADD4AA93F0FB}"/>
+          </ac:picMkLst>
+        </pc:picChg>
       </pc:sldChg>
     </pc:docChg>
   </pc:docChgLst>
@@ -3806,7 +4799,7 @@
 </file>
 
 <file path=ppt/slides/slide1.xml><?xml version="1.0" encoding="utf-8"?>
-<p:sld xmlns:a="http://schemas.openxmlformats.org/drawingml/2006/main" xmlns:r="http://schemas.openxmlformats.org/officeDocument/2006/relationships" xmlns:p="http://schemas.openxmlformats.org/presentationml/2006/main">
+<p:sld xmlns:a="http://schemas.openxmlformats.org/drawingml/2006/main" xmlns:r="http://schemas.openxmlformats.org/officeDocument/2006/relationships" xmlns:p="http://schemas.openxmlformats.org/presentationml/2006/main" show="0">
   <p:cSld>
     <p:spTree>
       <p:nvGrpSpPr>
@@ -4134,7 +5127,7 @@
 </file>
 
 <file path=ppt/slides/slide2.xml><?xml version="1.0" encoding="utf-8"?>
-<p:sld xmlns:a="http://schemas.openxmlformats.org/drawingml/2006/main" xmlns:r="http://schemas.openxmlformats.org/officeDocument/2006/relationships" xmlns:p="http://schemas.openxmlformats.org/presentationml/2006/main">
+<p:sld xmlns:a="http://schemas.openxmlformats.org/drawingml/2006/main" xmlns:r="http://schemas.openxmlformats.org/officeDocument/2006/relationships" xmlns:p="http://schemas.openxmlformats.org/presentationml/2006/main" show="0">
   <p:cSld>
     <p:spTree>
       <p:nvGrpSpPr>
@@ -4152,10 +5145,10 @@
       </p:grpSpPr>
       <p:pic>
         <p:nvPicPr>
-          <p:cNvPr id="8" name="図 7">
-            <a:extLst>
-              <a:ext uri="{FF2B5EF4-FFF2-40B4-BE49-F238E27FC236}">
-                <a16:creationId xmlns:a16="http://schemas.microsoft.com/office/drawing/2014/main" id="{FBD36F32-6A2C-39A9-2923-335BDF3B6BAF}"/>
+          <p:cNvPr id="5" name="図 4">
+            <a:extLst>
+              <a:ext uri="{FF2B5EF4-FFF2-40B4-BE49-F238E27FC236}">
+                <a16:creationId xmlns:a16="http://schemas.microsoft.com/office/drawing/2014/main" id="{D8FEED86-BF64-5BEE-9B31-F2EA7E24D5A5}"/>
               </a:ext>
             </a:extLst>
           </p:cNvPr>
@@ -4166,15 +5159,46 @@
         </p:nvPicPr>
         <p:blipFill>
           <a:blip r:embed="rId2"/>
-          <a:srcRect l="1527" t="623" r="1181" b="35749"/>
+          <a:srcRect l="1050" r="828"/>
           <a:stretch>
             <a:fillRect/>
           </a:stretch>
         </p:blipFill>
         <p:spPr>
           <a:xfrm>
-            <a:off x="1934936" y="-1759486"/>
-            <a:ext cx="6120000" cy="4262434"/>
+            <a:off x="880312" y="511475"/>
+            <a:ext cx="7514240" cy="7217525"/>
+          </a:xfrm>
+          <a:prstGeom prst="rect">
+            <a:avLst/>
+          </a:prstGeom>
+        </p:spPr>
+      </p:pic>
+      <p:pic>
+        <p:nvPicPr>
+          <p:cNvPr id="7" name="図 6">
+            <a:extLst>
+              <a:ext uri="{FF2B5EF4-FFF2-40B4-BE49-F238E27FC236}">
+                <a16:creationId xmlns:a16="http://schemas.microsoft.com/office/drawing/2014/main" id="{73A8D386-3F58-8A62-7289-74FDA4B7FA12}"/>
+              </a:ext>
+            </a:extLst>
+          </p:cNvPr>
+          <p:cNvPicPr>
+            <a:picLocks noChangeAspect="1"/>
+          </p:cNvPicPr>
+          <p:nvPr/>
+        </p:nvPicPr>
+        <p:blipFill>
+          <a:blip r:embed="rId3"/>
+          <a:srcRect l="1509" r="3098"/>
+          <a:stretch>
+            <a:fillRect/>
+          </a:stretch>
+        </p:blipFill>
+        <p:spPr>
+          <a:xfrm>
+            <a:off x="880678" y="1507362"/>
+            <a:ext cx="7514239" cy="7069050"/>
           </a:xfrm>
           <a:prstGeom prst="rect">
             <a:avLst/>
@@ -4186,7 +5210,7 @@
           <p:cNvPr id="9" name="図 8">
             <a:extLst>
               <a:ext uri="{FF2B5EF4-FFF2-40B4-BE49-F238E27FC236}">
-                <a16:creationId xmlns:a16="http://schemas.microsoft.com/office/drawing/2014/main" id="{5D0BCC34-B99B-814A-DBCA-8E46328E706F}"/>
+                <a16:creationId xmlns:a16="http://schemas.microsoft.com/office/drawing/2014/main" id="{23005A4A-7D6D-6970-2169-958AB3435B5C}"/>
               </a:ext>
             </a:extLst>
           </p:cNvPr>
@@ -4196,16 +5220,16 @@
           <p:nvPr/>
         </p:nvPicPr>
         <p:blipFill>
-          <a:blip r:embed="rId3"/>
-          <a:srcRect l="4130" t="5969" r="4105" b="20956"/>
+          <a:blip r:embed="rId4"/>
+          <a:srcRect l="1640" r="2621"/>
           <a:stretch>
             <a:fillRect/>
           </a:stretch>
         </p:blipFill>
         <p:spPr>
           <a:xfrm>
-            <a:off x="502434" y="891710"/>
-            <a:ext cx="6120000" cy="4589239"/>
+            <a:off x="880860" y="2371962"/>
+            <a:ext cx="7514242" cy="6706392"/>
           </a:xfrm>
           <a:prstGeom prst="rect">
             <a:avLst/>
@@ -4217,7 +5241,7 @@
           <p:cNvPr id="10" name="図 9">
             <a:extLst>
               <a:ext uri="{FF2B5EF4-FFF2-40B4-BE49-F238E27FC236}">
-                <a16:creationId xmlns:a16="http://schemas.microsoft.com/office/drawing/2014/main" id="{5AEC339F-6326-1157-6F50-281BEED8E3E5}"/>
+                <a16:creationId xmlns:a16="http://schemas.microsoft.com/office/drawing/2014/main" id="{799501F3-9A0F-04CB-0B8A-F912AEFE578A}"/>
               </a:ext>
             </a:extLst>
           </p:cNvPr>
@@ -4227,16 +5251,47 @@
           <p:nvPr/>
         </p:nvPicPr>
         <p:blipFill>
-          <a:blip r:embed="rId4"/>
-          <a:srcRect l="3832" t="2220" r="4403" b="1631"/>
+          <a:blip r:embed="rId5"/>
+          <a:srcRect l="800" r="2283"/>
           <a:stretch>
             <a:fillRect/>
           </a:stretch>
         </p:blipFill>
         <p:spPr>
           <a:xfrm>
-            <a:off x="7783285" y="277132"/>
-            <a:ext cx="6120000" cy="5875491"/>
+            <a:off x="880923" y="2861231"/>
+            <a:ext cx="7514297" cy="6978015"/>
+          </a:xfrm>
+          <a:prstGeom prst="rect">
+            <a:avLst/>
+          </a:prstGeom>
+        </p:spPr>
+      </p:pic>
+      <p:pic>
+        <p:nvPicPr>
+          <p:cNvPr id="11" name="図 10">
+            <a:extLst>
+              <a:ext uri="{FF2B5EF4-FFF2-40B4-BE49-F238E27FC236}">
+                <a16:creationId xmlns:a16="http://schemas.microsoft.com/office/drawing/2014/main" id="{57AE720E-C4F9-91F8-6FA7-3FF519B9B6C1}"/>
+              </a:ext>
+            </a:extLst>
+          </p:cNvPr>
+          <p:cNvPicPr>
+            <a:picLocks noChangeAspect="1"/>
+          </p:cNvPicPr>
+          <p:nvPr/>
+        </p:nvPicPr>
+        <p:blipFill>
+          <a:blip r:embed="rId6"/>
+          <a:srcRect l="1508" r="3444"/>
+          <a:stretch>
+            <a:fillRect/>
+          </a:stretch>
+        </p:blipFill>
+        <p:spPr>
+          <a:xfrm>
+            <a:off x="880982" y="3614340"/>
+            <a:ext cx="7514242" cy="6974699"/>
           </a:xfrm>
           <a:prstGeom prst="rect">
             <a:avLst/>
@@ -4248,7 +5303,7 @@
           <p:cNvPr id="12" name="図 11">
             <a:extLst>
               <a:ext uri="{FF2B5EF4-FFF2-40B4-BE49-F238E27FC236}">
-                <a16:creationId xmlns:a16="http://schemas.microsoft.com/office/drawing/2014/main" id="{80C38952-AEBF-79FA-83D8-330CCCF2AF98}"/>
+                <a16:creationId xmlns:a16="http://schemas.microsoft.com/office/drawing/2014/main" id="{7EF528B2-5226-E16C-4FE6-72DBD5492070}"/>
               </a:ext>
             </a:extLst>
           </p:cNvPr>
@@ -4258,31 +5313,143 @@
           <p:nvPr/>
         </p:nvPicPr>
         <p:blipFill>
-          <a:blip r:embed="rId5">
-            <a:extLst>
-              <a:ext uri="{28A0092B-C50C-407E-A947-70E740481C1C}">
-                <a14:useLocalDpi xmlns:a14="http://schemas.microsoft.com/office/drawing/2010/main" val="0"/>
-              </a:ext>
-            </a:extLst>
-          </a:blip>
+          <a:blip r:embed="rId7"/>
+          <a:srcRect l="1407" r="2268"/>
           <a:stretch>
             <a:fillRect/>
           </a:stretch>
         </p:blipFill>
         <p:spPr>
           <a:xfrm>
-            <a:off x="4108337" y="196296"/>
-            <a:ext cx="6120000" cy="9358295"/>
+            <a:off x="881011" y="4365881"/>
+            <a:ext cx="7514243" cy="6993133"/>
           </a:xfrm>
           <a:prstGeom prst="rect">
             <a:avLst/>
           </a:prstGeom>
         </p:spPr>
       </p:pic>
+      <p:pic>
+        <p:nvPicPr>
+          <p:cNvPr id="20" name="図 19">
+            <a:extLst>
+              <a:ext uri="{FF2B5EF4-FFF2-40B4-BE49-F238E27FC236}">
+                <a16:creationId xmlns:a16="http://schemas.microsoft.com/office/drawing/2014/main" id="{0F1BFCCF-9EEE-4CD1-4A9D-B8804724090E}"/>
+              </a:ext>
+            </a:extLst>
+          </p:cNvPr>
+          <p:cNvPicPr>
+            <a:picLocks noChangeAspect="1"/>
+          </p:cNvPicPr>
+          <p:nvPr/>
+        </p:nvPicPr>
+        <p:blipFill>
+          <a:blip r:embed="rId8"/>
+          <a:srcRect l="164" r="1878"/>
+          <a:stretch>
+            <a:fillRect/>
+          </a:stretch>
+        </p:blipFill>
+        <p:spPr>
+          <a:xfrm>
+            <a:off x="881024" y="5162119"/>
+            <a:ext cx="7514246" cy="5869261"/>
+          </a:xfrm>
+          <a:prstGeom prst="rect">
+            <a:avLst/>
+          </a:prstGeom>
+        </p:spPr>
+      </p:pic>
+      <p:cxnSp>
+        <p:nvCxnSpPr>
+          <p:cNvPr id="21" name="直線コネクタ 20">
+            <a:extLst>
+              <a:ext uri="{FF2B5EF4-FFF2-40B4-BE49-F238E27FC236}">
+                <a16:creationId xmlns:a16="http://schemas.microsoft.com/office/drawing/2014/main" id="{90DACBEE-A96B-0A0F-FA95-AD909F8FD013}"/>
+              </a:ext>
+            </a:extLst>
+          </p:cNvPr>
+          <p:cNvCxnSpPr>
+            <a:cxnSpLocks/>
+          </p:cNvCxnSpPr>
+          <p:nvPr/>
+        </p:nvCxnSpPr>
+        <p:spPr>
+          <a:xfrm>
+            <a:off x="881038" y="112032"/>
+            <a:ext cx="0" cy="8926286"/>
+          </a:xfrm>
+          <a:prstGeom prst="line">
+            <a:avLst/>
+          </a:prstGeom>
+          <a:ln w="76200">
+            <a:solidFill>
+              <a:srgbClr val="FF0000"/>
+            </a:solidFill>
+          </a:ln>
+        </p:spPr>
+        <p:style>
+          <a:lnRef idx="2">
+            <a:schemeClr val="accent1"/>
+          </a:lnRef>
+          <a:fillRef idx="0">
+            <a:schemeClr val="accent1"/>
+          </a:fillRef>
+          <a:effectRef idx="1">
+            <a:schemeClr val="accent1"/>
+          </a:effectRef>
+          <a:fontRef idx="minor">
+            <a:schemeClr val="tx1"/>
+          </a:fontRef>
+        </p:style>
+      </p:cxnSp>
+      <p:cxnSp>
+        <p:nvCxnSpPr>
+          <p:cNvPr id="22" name="直線コネクタ 21">
+            <a:extLst>
+              <a:ext uri="{FF2B5EF4-FFF2-40B4-BE49-F238E27FC236}">
+                <a16:creationId xmlns:a16="http://schemas.microsoft.com/office/drawing/2014/main" id="{B6C08575-9687-AAEB-72B6-FDF126B8705E}"/>
+              </a:ext>
+            </a:extLst>
+          </p:cNvPr>
+          <p:cNvCxnSpPr>
+            <a:cxnSpLocks/>
+          </p:cNvCxnSpPr>
+          <p:nvPr/>
+        </p:nvCxnSpPr>
+        <p:spPr>
+          <a:xfrm>
+            <a:off x="8395283" y="112032"/>
+            <a:ext cx="0" cy="8926286"/>
+          </a:xfrm>
+          <a:prstGeom prst="line">
+            <a:avLst/>
+          </a:prstGeom>
+          <a:ln w="76200">
+            <a:solidFill>
+              <a:srgbClr val="FF0000"/>
+            </a:solidFill>
+          </a:ln>
+        </p:spPr>
+        <p:style>
+          <a:lnRef idx="2">
+            <a:schemeClr val="accent1"/>
+          </a:lnRef>
+          <a:fillRef idx="0">
+            <a:schemeClr val="accent1"/>
+          </a:fillRef>
+          <a:effectRef idx="1">
+            <a:schemeClr val="accent1"/>
+          </a:effectRef>
+          <a:fontRef idx="minor">
+            <a:schemeClr val="tx1"/>
+          </a:fontRef>
+        </p:style>
+      </p:cxnSp>
     </p:spTree>
     <p:extLst>
       <p:ext uri="{BB962C8B-B14F-4D97-AF65-F5344CB8AC3E}">
-        <p14:creationId xmlns:p14="http://schemas.microsoft.com/office/powerpoint/2010/main" val="3471162126"/>
+        <p14:creationId xmlns:p14="http://schemas.microsoft.com/office/powerpoint/2010/main" val="977605083"/>
       </p:ext>
     </p:extLst>
   </p:cSld>
@@ -4293,11 +5460,17 @@
 </file>
 
 <file path=ppt/slides/slide3.xml><?xml version="1.0" encoding="utf-8"?>
-<p:sld xmlns:a="http://schemas.openxmlformats.org/drawingml/2006/main" xmlns:r="http://schemas.openxmlformats.org/officeDocument/2006/relationships" xmlns:p="http://schemas.openxmlformats.org/presentationml/2006/main">
+<p:sld xmlns:a="http://schemas.openxmlformats.org/drawingml/2006/main" xmlns:r="http://schemas.openxmlformats.org/officeDocument/2006/relationships" xmlns:p="http://schemas.openxmlformats.org/presentationml/2006/main" show="0">
   <p:cSld>
     <p:spTree>
       <p:nvGrpSpPr>
-        <p:cNvPr id="1" name=""/>
+        <p:cNvPr id="1" name="">
+          <a:extLst>
+            <a:ext uri="{FF2B5EF4-FFF2-40B4-BE49-F238E27FC236}">
+              <a16:creationId xmlns:a16="http://schemas.microsoft.com/office/drawing/2014/main" id="{D8411286-5378-71A7-B6CA-785D12A35040}"/>
+            </a:ext>
+          </a:extLst>
+        </p:cNvPr>
         <p:cNvGrpSpPr/>
         <p:nvPr/>
       </p:nvGrpSpPr>
@@ -4309,60 +5482,744 @@
           <a:chExt cx="0" cy="0"/>
         </a:xfrm>
       </p:grpSpPr>
-      <p:sp>
-        <p:nvSpPr>
-          <p:cNvPr id="2" name="タイトル 1">
-            <a:extLst>
-              <a:ext uri="{FF2B5EF4-FFF2-40B4-BE49-F238E27FC236}">
-                <a16:creationId xmlns:a16="http://schemas.microsoft.com/office/drawing/2014/main" id="{D40B049C-D724-E266-73EA-B091A5F84007}"/>
-              </a:ext>
-            </a:extLst>
-          </p:cNvPr>
-          <p:cNvSpPr>
-            <a:spLocks noGrp="1"/>
-          </p:cNvSpPr>
-          <p:nvPr>
-            <p:ph type="title"/>
-          </p:nvPr>
-        </p:nvSpPr>
-        <p:spPr/>
-        <p:txBody>
-          <a:bodyPr/>
-          <a:lstStyle/>
-          <a:p>
-            <a:endParaRPr kumimoji="1" lang="ja-JP" altLang="en-US"/>
-          </a:p>
-        </p:txBody>
-      </p:sp>
-      <p:sp>
-        <p:nvSpPr>
-          <p:cNvPr id="3" name="コンテンツ プレースホルダー 2">
-            <a:extLst>
-              <a:ext uri="{FF2B5EF4-FFF2-40B4-BE49-F238E27FC236}">
-                <a16:creationId xmlns:a16="http://schemas.microsoft.com/office/drawing/2014/main" id="{0E3B5C5D-1A5E-45DB-2488-ADFC616DC2C5}"/>
-              </a:ext>
-            </a:extLst>
-          </p:cNvPr>
-          <p:cNvSpPr>
-            <a:spLocks noGrp="1"/>
-          </p:cNvSpPr>
-          <p:nvPr>
-            <p:ph idx="1"/>
-          </p:nvPr>
-        </p:nvSpPr>
-        <p:spPr/>
-        <p:txBody>
-          <a:bodyPr/>
-          <a:lstStyle/>
-          <a:p>
-            <a:endParaRPr kumimoji="1" lang="ja-JP" altLang="en-US"/>
-          </a:p>
-        </p:txBody>
-      </p:sp>
+      <p:pic>
+        <p:nvPicPr>
+          <p:cNvPr id="5" name="図 4">
+            <a:extLst>
+              <a:ext uri="{FF2B5EF4-FFF2-40B4-BE49-F238E27FC236}">
+                <a16:creationId xmlns:a16="http://schemas.microsoft.com/office/drawing/2014/main" id="{9780B836-9134-02D6-207D-9BE298A97078}"/>
+              </a:ext>
+            </a:extLst>
+          </p:cNvPr>
+          <p:cNvPicPr>
+            <a:picLocks noChangeAspect="1"/>
+          </p:cNvPicPr>
+          <p:nvPr/>
+        </p:nvPicPr>
+        <p:blipFill>
+          <a:blip r:embed="rId2"/>
+          <a:srcRect l="1050" t="1931" r="828" b="24280"/>
+          <a:stretch>
+            <a:fillRect/>
+          </a:stretch>
+        </p:blipFill>
+        <p:spPr>
+          <a:xfrm>
+            <a:off x="0" y="650880"/>
+            <a:ext cx="7514240" cy="5325714"/>
+          </a:xfrm>
+          <a:prstGeom prst="rect">
+            <a:avLst/>
+          </a:prstGeom>
+        </p:spPr>
+      </p:pic>
+      <p:pic>
+        <p:nvPicPr>
+          <p:cNvPr id="7" name="図 6">
+            <a:extLst>
+              <a:ext uri="{FF2B5EF4-FFF2-40B4-BE49-F238E27FC236}">
+                <a16:creationId xmlns:a16="http://schemas.microsoft.com/office/drawing/2014/main" id="{97C3972A-1A21-5F46-C3A7-CD891E2CDD0B}"/>
+              </a:ext>
+            </a:extLst>
+          </p:cNvPr>
+          <p:cNvPicPr>
+            <a:picLocks noChangeAspect="1"/>
+          </p:cNvPicPr>
+          <p:nvPr/>
+        </p:nvPicPr>
+        <p:blipFill>
+          <a:blip r:embed="rId3"/>
+          <a:srcRect l="1509" t="15637" r="3098"/>
+          <a:stretch>
+            <a:fillRect/>
+          </a:stretch>
+        </p:blipFill>
+        <p:spPr>
+          <a:xfrm>
+            <a:off x="779615" y="1635414"/>
+            <a:ext cx="7514239" cy="5963582"/>
+          </a:xfrm>
+          <a:prstGeom prst="rect">
+            <a:avLst/>
+          </a:prstGeom>
+        </p:spPr>
+      </p:pic>
+      <p:pic>
+        <p:nvPicPr>
+          <p:cNvPr id="9" name="図 8">
+            <a:extLst>
+              <a:ext uri="{FF2B5EF4-FFF2-40B4-BE49-F238E27FC236}">
+                <a16:creationId xmlns:a16="http://schemas.microsoft.com/office/drawing/2014/main" id="{9A16DAED-9ADE-F797-BC9C-16C6C3AD9C25}"/>
+              </a:ext>
+            </a:extLst>
+          </p:cNvPr>
+          <p:cNvPicPr>
+            <a:picLocks noChangeAspect="1"/>
+          </p:cNvPicPr>
+          <p:nvPr/>
+        </p:nvPicPr>
+        <p:blipFill>
+          <a:blip r:embed="rId4"/>
+          <a:srcRect l="1640" r="2621"/>
+          <a:stretch>
+            <a:fillRect/>
+          </a:stretch>
+        </p:blipFill>
+        <p:spPr>
+          <a:xfrm>
+            <a:off x="1559229" y="4385891"/>
+            <a:ext cx="7514242" cy="6706392"/>
+          </a:xfrm>
+          <a:prstGeom prst="rect">
+            <a:avLst/>
+          </a:prstGeom>
+        </p:spPr>
+      </p:pic>
+      <p:pic>
+        <p:nvPicPr>
+          <p:cNvPr id="10" name="図 9">
+            <a:extLst>
+              <a:ext uri="{FF2B5EF4-FFF2-40B4-BE49-F238E27FC236}">
+                <a16:creationId xmlns:a16="http://schemas.microsoft.com/office/drawing/2014/main" id="{4C3F922B-665F-858F-DC34-7CF3C232CEA8}"/>
+              </a:ext>
+            </a:extLst>
+          </p:cNvPr>
+          <p:cNvPicPr>
+            <a:picLocks noChangeAspect="1"/>
+          </p:cNvPicPr>
+          <p:nvPr/>
+        </p:nvPicPr>
+        <p:blipFill>
+          <a:blip r:embed="rId5"/>
+          <a:srcRect l="800" t="17257" r="2283" b="-1"/>
+          <a:stretch>
+            <a:fillRect/>
+          </a:stretch>
+        </p:blipFill>
+        <p:spPr>
+          <a:xfrm>
+            <a:off x="2338846" y="1635413"/>
+            <a:ext cx="7514297" cy="5773838"/>
+          </a:xfrm>
+          <a:prstGeom prst="rect">
+            <a:avLst/>
+          </a:prstGeom>
+        </p:spPr>
+      </p:pic>
+      <p:pic>
+        <p:nvPicPr>
+          <p:cNvPr id="11" name="図 10">
+            <a:extLst>
+              <a:ext uri="{FF2B5EF4-FFF2-40B4-BE49-F238E27FC236}">
+                <a16:creationId xmlns:a16="http://schemas.microsoft.com/office/drawing/2014/main" id="{6D116406-559E-5D1C-A458-4928B9667BF0}"/>
+              </a:ext>
+            </a:extLst>
+          </p:cNvPr>
+          <p:cNvPicPr>
+            <a:picLocks noChangeAspect="1"/>
+          </p:cNvPicPr>
+          <p:nvPr/>
+        </p:nvPicPr>
+        <p:blipFill>
+          <a:blip r:embed="rId6"/>
+          <a:srcRect l="1508" r="3444"/>
+          <a:stretch>
+            <a:fillRect/>
+          </a:stretch>
+        </p:blipFill>
+        <p:spPr>
+          <a:xfrm>
+            <a:off x="3118518" y="4385891"/>
+            <a:ext cx="7514242" cy="6974699"/>
+          </a:xfrm>
+          <a:prstGeom prst="rect">
+            <a:avLst/>
+          </a:prstGeom>
+        </p:spPr>
+      </p:pic>
+      <p:pic>
+        <p:nvPicPr>
+          <p:cNvPr id="12" name="図 11">
+            <a:extLst>
+              <a:ext uri="{FF2B5EF4-FFF2-40B4-BE49-F238E27FC236}">
+                <a16:creationId xmlns:a16="http://schemas.microsoft.com/office/drawing/2014/main" id="{29B2D880-D942-6912-002D-41C0D2211BAF}"/>
+              </a:ext>
+            </a:extLst>
+          </p:cNvPr>
+          <p:cNvPicPr>
+            <a:picLocks noChangeAspect="1"/>
+          </p:cNvPicPr>
+          <p:nvPr/>
+        </p:nvPicPr>
+        <p:blipFill>
+          <a:blip r:embed="rId7"/>
+          <a:srcRect l="1407" r="2268"/>
+          <a:stretch>
+            <a:fillRect/>
+          </a:stretch>
+        </p:blipFill>
+        <p:spPr>
+          <a:xfrm>
+            <a:off x="3898135" y="4385891"/>
+            <a:ext cx="7514243" cy="6993133"/>
+          </a:xfrm>
+          <a:prstGeom prst="rect">
+            <a:avLst/>
+          </a:prstGeom>
+        </p:spPr>
+      </p:pic>
+      <p:pic>
+        <p:nvPicPr>
+          <p:cNvPr id="20" name="図 19">
+            <a:extLst>
+              <a:ext uri="{FF2B5EF4-FFF2-40B4-BE49-F238E27FC236}">
+                <a16:creationId xmlns:a16="http://schemas.microsoft.com/office/drawing/2014/main" id="{68134C8F-4ADD-1626-7AE0-EF612ABBBE19}"/>
+              </a:ext>
+            </a:extLst>
+          </p:cNvPr>
+          <p:cNvPicPr>
+            <a:picLocks noChangeAspect="1"/>
+          </p:cNvPicPr>
+          <p:nvPr/>
+        </p:nvPicPr>
+        <p:blipFill>
+          <a:blip r:embed="rId8"/>
+          <a:srcRect l="164" t="21101" r="1878" b="1"/>
+          <a:stretch>
+            <a:fillRect/>
+          </a:stretch>
+        </p:blipFill>
+        <p:spPr>
+          <a:xfrm>
+            <a:off x="4677754" y="1635413"/>
+            <a:ext cx="7514246" cy="4630738"/>
+          </a:xfrm>
+          <a:prstGeom prst="rect">
+            <a:avLst/>
+          </a:prstGeom>
+        </p:spPr>
+      </p:pic>
+      <p:cxnSp>
+        <p:nvCxnSpPr>
+          <p:cNvPr id="2" name="直線コネクタ 1">
+            <a:extLst>
+              <a:ext uri="{FF2B5EF4-FFF2-40B4-BE49-F238E27FC236}">
+                <a16:creationId xmlns:a16="http://schemas.microsoft.com/office/drawing/2014/main" id="{BD0CBA6A-43B4-9973-C145-33F0B59F4FF2}"/>
+              </a:ext>
+            </a:extLst>
+          </p:cNvPr>
+          <p:cNvCxnSpPr>
+            <a:cxnSpLocks/>
+          </p:cNvCxnSpPr>
+          <p:nvPr/>
+        </p:nvCxnSpPr>
+        <p:spPr>
+          <a:xfrm>
+            <a:off x="-443345" y="1949739"/>
+            <a:ext cx="13171054" cy="0"/>
+          </a:xfrm>
+          <a:prstGeom prst="line">
+            <a:avLst/>
+          </a:prstGeom>
+        </p:spPr>
+        <p:style>
+          <a:lnRef idx="2">
+            <a:schemeClr val="accent1"/>
+          </a:lnRef>
+          <a:fillRef idx="0">
+            <a:schemeClr val="accent1"/>
+          </a:fillRef>
+          <a:effectRef idx="1">
+            <a:schemeClr val="accent1"/>
+          </a:effectRef>
+          <a:fontRef idx="minor">
+            <a:schemeClr val="tx1"/>
+          </a:fontRef>
+        </p:style>
+      </p:cxnSp>
+      <p:cxnSp>
+        <p:nvCxnSpPr>
+          <p:cNvPr id="6" name="直線コネクタ 5">
+            <a:extLst>
+              <a:ext uri="{FF2B5EF4-FFF2-40B4-BE49-F238E27FC236}">
+                <a16:creationId xmlns:a16="http://schemas.microsoft.com/office/drawing/2014/main" id="{47B3A48C-2C7D-3BB2-64FE-F4C692A1CC75}"/>
+              </a:ext>
+            </a:extLst>
+          </p:cNvPr>
+          <p:cNvCxnSpPr>
+            <a:cxnSpLocks/>
+          </p:cNvCxnSpPr>
+          <p:nvPr/>
+        </p:nvCxnSpPr>
+        <p:spPr>
+          <a:xfrm>
+            <a:off x="-443345" y="650883"/>
+            <a:ext cx="13171054" cy="0"/>
+          </a:xfrm>
+          <a:prstGeom prst="line">
+            <a:avLst/>
+          </a:prstGeom>
+        </p:spPr>
+        <p:style>
+          <a:lnRef idx="2">
+            <a:schemeClr val="accent1"/>
+          </a:lnRef>
+          <a:fillRef idx="0">
+            <a:schemeClr val="accent1"/>
+          </a:fillRef>
+          <a:effectRef idx="1">
+            <a:schemeClr val="accent1"/>
+          </a:effectRef>
+          <a:fontRef idx="minor">
+            <a:schemeClr val="tx1"/>
+          </a:fontRef>
+        </p:style>
+      </p:cxnSp>
+      <p:cxnSp>
+        <p:nvCxnSpPr>
+          <p:cNvPr id="14" name="直線コネクタ 13">
+            <a:extLst>
+              <a:ext uri="{FF2B5EF4-FFF2-40B4-BE49-F238E27FC236}">
+                <a16:creationId xmlns:a16="http://schemas.microsoft.com/office/drawing/2014/main" id="{28133543-4F55-4A39-C9A0-3E63B4FA4C9E}"/>
+              </a:ext>
+            </a:extLst>
+          </p:cNvPr>
+          <p:cNvCxnSpPr>
+            <a:cxnSpLocks/>
+          </p:cNvCxnSpPr>
+          <p:nvPr/>
+        </p:nvCxnSpPr>
+        <p:spPr>
+          <a:xfrm>
+            <a:off x="-443345" y="1635414"/>
+            <a:ext cx="13171054" cy="0"/>
+          </a:xfrm>
+          <a:prstGeom prst="line">
+            <a:avLst/>
+          </a:prstGeom>
+        </p:spPr>
+        <p:style>
+          <a:lnRef idx="2">
+            <a:schemeClr val="accent1"/>
+          </a:lnRef>
+          <a:fillRef idx="0">
+            <a:schemeClr val="accent1"/>
+          </a:fillRef>
+          <a:effectRef idx="1">
+            <a:schemeClr val="accent1"/>
+          </a:effectRef>
+          <a:fontRef idx="minor">
+            <a:schemeClr val="tx1"/>
+          </a:fontRef>
+        </p:style>
+      </p:cxnSp>
     </p:spTree>
     <p:extLst>
       <p:ext uri="{BB962C8B-B14F-4D97-AF65-F5344CB8AC3E}">
-        <p14:creationId xmlns:p14="http://schemas.microsoft.com/office/powerpoint/2010/main" val="977605083"/>
+        <p14:creationId xmlns:p14="http://schemas.microsoft.com/office/powerpoint/2010/main" val="1320575984"/>
+      </p:ext>
+    </p:extLst>
+  </p:cSld>
+  <p:clrMapOvr>
+    <a:masterClrMapping/>
+  </p:clrMapOvr>
+</p:sld>
+</file>
+
+<file path=ppt/slides/slide4.xml><?xml version="1.0" encoding="utf-8"?>
+<p:sld xmlns:a="http://schemas.openxmlformats.org/drawingml/2006/main" xmlns:r="http://schemas.openxmlformats.org/officeDocument/2006/relationships" xmlns:p="http://schemas.openxmlformats.org/presentationml/2006/main">
+  <p:cSld>
+    <p:spTree>
+      <p:nvGrpSpPr>
+        <p:cNvPr id="1" name="">
+          <a:extLst>
+            <a:ext uri="{FF2B5EF4-FFF2-40B4-BE49-F238E27FC236}">
+              <a16:creationId xmlns:a16="http://schemas.microsoft.com/office/drawing/2014/main" id="{661CF526-A80A-5ADF-EE54-2EE6EC27930D}"/>
+            </a:ext>
+          </a:extLst>
+        </p:cNvPr>
+        <p:cNvGrpSpPr/>
+        <p:nvPr/>
+      </p:nvGrpSpPr>
+      <p:grpSpPr>
+        <a:xfrm>
+          <a:off x="0" y="0"/>
+          <a:ext cx="0" cy="0"/>
+          <a:chOff x="0" y="0"/>
+          <a:chExt cx="0" cy="0"/>
+        </a:xfrm>
+      </p:grpSpPr>
+      <p:pic>
+        <p:nvPicPr>
+          <p:cNvPr id="5" name="図 4">
+            <a:extLst>
+              <a:ext uri="{FF2B5EF4-FFF2-40B4-BE49-F238E27FC236}">
+                <a16:creationId xmlns:a16="http://schemas.microsoft.com/office/drawing/2014/main" id="{5B64073B-9704-5A39-5B05-D13EA9520737}"/>
+              </a:ext>
+            </a:extLst>
+          </p:cNvPr>
+          <p:cNvPicPr>
+            <a:picLocks noChangeAspect="1"/>
+          </p:cNvPicPr>
+          <p:nvPr/>
+        </p:nvPicPr>
+        <p:blipFill>
+          <a:blip r:embed="rId2"/>
+          <a:srcRect l="1050" t="1931" r="828" b="24280"/>
+          <a:stretch>
+            <a:fillRect/>
+          </a:stretch>
+        </p:blipFill>
+        <p:spPr>
+          <a:xfrm>
+            <a:off x="1971675" y="527055"/>
+            <a:ext cx="7560000" cy="5358146"/>
+          </a:xfrm>
+          <a:prstGeom prst="rect">
+            <a:avLst/>
+          </a:prstGeom>
+        </p:spPr>
+      </p:pic>
+    </p:spTree>
+    <p:extLst>
+      <p:ext uri="{BB962C8B-B14F-4D97-AF65-F5344CB8AC3E}">
+        <p14:creationId xmlns:p14="http://schemas.microsoft.com/office/powerpoint/2010/main" val="1018347364"/>
+      </p:ext>
+    </p:extLst>
+  </p:cSld>
+  <p:clrMapOvr>
+    <a:masterClrMapping/>
+  </p:clrMapOvr>
+</p:sld>
+</file>
+
+<file path=ppt/slides/slide5.xml><?xml version="1.0" encoding="utf-8"?>
+<p:sld xmlns:a="http://schemas.openxmlformats.org/drawingml/2006/main" xmlns:r="http://schemas.openxmlformats.org/officeDocument/2006/relationships" xmlns:p="http://schemas.openxmlformats.org/presentationml/2006/main">
+  <p:cSld>
+    <p:spTree>
+      <p:nvGrpSpPr>
+        <p:cNvPr id="1" name="">
+          <a:extLst>
+            <a:ext uri="{FF2B5EF4-FFF2-40B4-BE49-F238E27FC236}">
+              <a16:creationId xmlns:a16="http://schemas.microsoft.com/office/drawing/2014/main" id="{788A22AE-E324-EF44-F478-E73EC3E2D9E9}"/>
+            </a:ext>
+          </a:extLst>
+        </p:cNvPr>
+        <p:cNvGrpSpPr/>
+        <p:nvPr/>
+      </p:nvGrpSpPr>
+      <p:grpSpPr>
+        <a:xfrm>
+          <a:off x="0" y="0"/>
+          <a:ext cx="0" cy="0"/>
+          <a:chOff x="0" y="0"/>
+          <a:chExt cx="0" cy="0"/>
+        </a:xfrm>
+      </p:grpSpPr>
+      <p:grpSp>
+        <p:nvGrpSpPr>
+          <p:cNvPr id="2" name="グループ化 1">
+            <a:extLst>
+              <a:ext uri="{FF2B5EF4-FFF2-40B4-BE49-F238E27FC236}">
+                <a16:creationId xmlns:a16="http://schemas.microsoft.com/office/drawing/2014/main" id="{2DEBD4A9-657D-D0F6-1ACD-DB09B84986C3}"/>
+              </a:ext>
+            </a:extLst>
+          </p:cNvPr>
+          <p:cNvGrpSpPr/>
+          <p:nvPr/>
+        </p:nvGrpSpPr>
+        <p:grpSpPr>
+          <a:xfrm>
+            <a:off x="2870352" y="338554"/>
+            <a:ext cx="7559999" cy="5692791"/>
+            <a:chOff x="2870352" y="-2570900"/>
+            <a:chExt cx="7559999" cy="5692791"/>
+          </a:xfrm>
+        </p:grpSpPr>
+        <p:pic>
+          <p:nvPicPr>
+            <p:cNvPr id="7" name="図 6">
+              <a:extLst>
+                <a:ext uri="{FF2B5EF4-FFF2-40B4-BE49-F238E27FC236}">
+                  <a16:creationId xmlns:a16="http://schemas.microsoft.com/office/drawing/2014/main" id="{C26839ED-5D36-F59F-E053-464D232C76C4}"/>
+                </a:ext>
+              </a:extLst>
+            </p:cNvPr>
+            <p:cNvPicPr>
+              <a:picLocks noChangeAspect="1"/>
+            </p:cNvPicPr>
+            <p:nvPr/>
+          </p:nvPicPr>
+          <p:blipFill>
+            <a:blip r:embed="rId2"/>
+            <a:srcRect l="1450" t="15637" r="3157" b="30032"/>
+            <a:stretch>
+              <a:fillRect/>
+            </a:stretch>
+          </p:blipFill>
+          <p:spPr>
+            <a:xfrm>
+              <a:off x="2870352" y="-2570900"/>
+              <a:ext cx="7559999" cy="3863991"/>
+            </a:xfrm>
+            <a:prstGeom prst="rect">
+              <a:avLst/>
+            </a:prstGeom>
+          </p:spPr>
+        </p:pic>
+        <p:pic>
+          <p:nvPicPr>
+            <p:cNvPr id="9" name="図 8">
+              <a:extLst>
+                <a:ext uri="{FF2B5EF4-FFF2-40B4-BE49-F238E27FC236}">
+                  <a16:creationId xmlns:a16="http://schemas.microsoft.com/office/drawing/2014/main" id="{7C75AFD9-2FAE-4ACE-AEC9-F61B1065A6F3}"/>
+                </a:ext>
+              </a:extLst>
+            </p:cNvPr>
+            <p:cNvPicPr>
+              <a:picLocks noChangeAspect="1"/>
+            </p:cNvPicPr>
+            <p:nvPr/>
+          </p:nvPicPr>
+          <p:blipFill>
+            <a:blip r:embed="rId3"/>
+            <a:srcRect l="1640" t="21055" r="2620" b="48275"/>
+            <a:stretch>
+              <a:fillRect/>
+            </a:stretch>
+          </p:blipFill>
+          <p:spPr>
+            <a:xfrm>
+              <a:off x="2870352" y="1052513"/>
+              <a:ext cx="7559999" cy="2069378"/>
+            </a:xfrm>
+            <a:prstGeom prst="rect">
+              <a:avLst/>
+            </a:prstGeom>
+          </p:spPr>
+        </p:pic>
+      </p:grpSp>
+    </p:spTree>
+    <p:extLst>
+      <p:ext uri="{BB962C8B-B14F-4D97-AF65-F5344CB8AC3E}">
+        <p14:creationId xmlns:p14="http://schemas.microsoft.com/office/powerpoint/2010/main" val="4224806389"/>
+      </p:ext>
+    </p:extLst>
+  </p:cSld>
+  <p:clrMapOvr>
+    <a:masterClrMapping/>
+  </p:clrMapOvr>
+</p:sld>
+</file>
+
+<file path=ppt/slides/slide6.xml><?xml version="1.0" encoding="utf-8"?>
+<p:sld xmlns:a="http://schemas.openxmlformats.org/drawingml/2006/main" xmlns:r="http://schemas.openxmlformats.org/officeDocument/2006/relationships" xmlns:p="http://schemas.openxmlformats.org/presentationml/2006/main">
+  <p:cSld>
+    <p:spTree>
+      <p:nvGrpSpPr>
+        <p:cNvPr id="1" name="">
+          <a:extLst>
+            <a:ext uri="{FF2B5EF4-FFF2-40B4-BE49-F238E27FC236}">
+              <a16:creationId xmlns:a16="http://schemas.microsoft.com/office/drawing/2014/main" id="{B4D7BD38-813B-0645-4C71-9998A3BFC289}"/>
+            </a:ext>
+          </a:extLst>
+        </p:cNvPr>
+        <p:cNvGrpSpPr/>
+        <p:nvPr/>
+      </p:nvGrpSpPr>
+      <p:grpSpPr>
+        <a:xfrm>
+          <a:off x="0" y="0"/>
+          <a:ext cx="0" cy="0"/>
+          <a:chOff x="0" y="0"/>
+          <a:chExt cx="0" cy="0"/>
+        </a:xfrm>
+      </p:grpSpPr>
+      <p:grpSp>
+        <p:nvGrpSpPr>
+          <p:cNvPr id="2" name="グループ化 1">
+            <a:extLst>
+              <a:ext uri="{FF2B5EF4-FFF2-40B4-BE49-F238E27FC236}">
+                <a16:creationId xmlns:a16="http://schemas.microsoft.com/office/drawing/2014/main" id="{F8C9C589-2195-396F-E414-EB28E8948B18}"/>
+              </a:ext>
+            </a:extLst>
+          </p:cNvPr>
+          <p:cNvGrpSpPr/>
+          <p:nvPr/>
+        </p:nvGrpSpPr>
+        <p:grpSpPr>
+          <a:xfrm>
+            <a:off x="2338845" y="-1374487"/>
+            <a:ext cx="7560000" cy="11599142"/>
+            <a:chOff x="2338845" y="-1374487"/>
+            <a:chExt cx="7560000" cy="11599142"/>
+          </a:xfrm>
+        </p:grpSpPr>
+        <p:pic>
+          <p:nvPicPr>
+            <p:cNvPr id="10" name="図 9">
+              <a:extLst>
+                <a:ext uri="{FF2B5EF4-FFF2-40B4-BE49-F238E27FC236}">
+                  <a16:creationId xmlns:a16="http://schemas.microsoft.com/office/drawing/2014/main" id="{75F8B4B3-D22E-D633-8B73-1563A909B4CE}"/>
+                </a:ext>
+              </a:extLst>
+            </p:cNvPr>
+            <p:cNvPicPr>
+              <a:picLocks noChangeAspect="1"/>
+            </p:cNvPicPr>
+            <p:nvPr/>
+          </p:nvPicPr>
+          <p:blipFill>
+            <a:blip r:embed="rId2"/>
+            <a:srcRect l="800" t="17257" r="2283" b="-1"/>
+            <a:stretch>
+              <a:fillRect/>
+            </a:stretch>
+          </p:blipFill>
+          <p:spPr>
+            <a:xfrm>
+              <a:off x="2338845" y="-1374487"/>
+              <a:ext cx="7560000" cy="5808955"/>
+            </a:xfrm>
+            <a:prstGeom prst="rect">
+              <a:avLst/>
+            </a:prstGeom>
+          </p:spPr>
+        </p:pic>
+        <p:pic>
+          <p:nvPicPr>
+            <p:cNvPr id="11" name="図 10">
+              <a:extLst>
+                <a:ext uri="{FF2B5EF4-FFF2-40B4-BE49-F238E27FC236}">
+                  <a16:creationId xmlns:a16="http://schemas.microsoft.com/office/drawing/2014/main" id="{E22A94D7-A088-04D1-3944-088F841EB7E7}"/>
+                </a:ext>
+              </a:extLst>
+            </p:cNvPr>
+            <p:cNvPicPr>
+              <a:picLocks noChangeAspect="1"/>
+            </p:cNvPicPr>
+            <p:nvPr/>
+          </p:nvPicPr>
+          <p:blipFill>
+            <a:blip r:embed="rId3"/>
+            <a:srcRect l="1508" t="14524" r="3444"/>
+            <a:stretch>
+              <a:fillRect/>
+            </a:stretch>
+          </p:blipFill>
+          <p:spPr>
+            <a:xfrm>
+              <a:off x="2338845" y="3333749"/>
+              <a:ext cx="7560000" cy="5998027"/>
+            </a:xfrm>
+            <a:prstGeom prst="rect">
+              <a:avLst/>
+            </a:prstGeom>
+          </p:spPr>
+        </p:pic>
+        <p:pic>
+          <p:nvPicPr>
+            <p:cNvPr id="12" name="図 11">
+              <a:extLst>
+                <a:ext uri="{FF2B5EF4-FFF2-40B4-BE49-F238E27FC236}">
+                  <a16:creationId xmlns:a16="http://schemas.microsoft.com/office/drawing/2014/main" id="{BC4A45AC-C517-8777-BDF9-D02E35E5C76C}"/>
+                </a:ext>
+              </a:extLst>
+            </p:cNvPr>
+            <p:cNvPicPr>
+              <a:picLocks noChangeAspect="1"/>
+            </p:cNvPicPr>
+            <p:nvPr/>
+          </p:nvPicPr>
+          <p:blipFill>
+            <a:blip r:embed="rId4"/>
+            <a:srcRect l="1407" t="21249" r="2268" b="22254"/>
+            <a:stretch>
+              <a:fillRect/>
+            </a:stretch>
+          </p:blipFill>
+          <p:spPr>
+            <a:xfrm>
+              <a:off x="2338845" y="6249556"/>
+              <a:ext cx="7560000" cy="3975099"/>
+            </a:xfrm>
+            <a:prstGeom prst="rect">
+              <a:avLst/>
+            </a:prstGeom>
+          </p:spPr>
+        </p:pic>
+      </p:grpSp>
+    </p:spTree>
+    <p:extLst>
+      <p:ext uri="{BB962C8B-B14F-4D97-AF65-F5344CB8AC3E}">
+        <p14:creationId xmlns:p14="http://schemas.microsoft.com/office/powerpoint/2010/main" val="1945534796"/>
+      </p:ext>
+    </p:extLst>
+  </p:cSld>
+  <p:clrMapOvr>
+    <a:masterClrMapping/>
+  </p:clrMapOvr>
+</p:sld>
+</file>
+
+<file path=ppt/slides/slide7.xml><?xml version="1.0" encoding="utf-8"?>
+<p:sld xmlns:a="http://schemas.openxmlformats.org/drawingml/2006/main" xmlns:r="http://schemas.openxmlformats.org/officeDocument/2006/relationships" xmlns:p="http://schemas.openxmlformats.org/presentationml/2006/main">
+  <p:cSld>
+    <p:spTree>
+      <p:nvGrpSpPr>
+        <p:cNvPr id="1" name="">
+          <a:extLst>
+            <a:ext uri="{FF2B5EF4-FFF2-40B4-BE49-F238E27FC236}">
+              <a16:creationId xmlns:a16="http://schemas.microsoft.com/office/drawing/2014/main" id="{A78F017E-479A-EC89-35C4-DD94CEEDD27A}"/>
+            </a:ext>
+          </a:extLst>
+        </p:cNvPr>
+        <p:cNvGrpSpPr/>
+        <p:nvPr/>
+      </p:nvGrpSpPr>
+      <p:grpSpPr>
+        <a:xfrm>
+          <a:off x="0" y="0"/>
+          <a:ext cx="0" cy="0"/>
+          <a:chOff x="0" y="0"/>
+          <a:chExt cx="0" cy="0"/>
+        </a:xfrm>
+      </p:grpSpPr>
+      <p:pic>
+        <p:nvPicPr>
+          <p:cNvPr id="20" name="図 19">
+            <a:extLst>
+              <a:ext uri="{FF2B5EF4-FFF2-40B4-BE49-F238E27FC236}">
+                <a16:creationId xmlns:a16="http://schemas.microsoft.com/office/drawing/2014/main" id="{EE9E9111-C76F-3825-1360-ADD4AA93F0FB}"/>
+              </a:ext>
+            </a:extLst>
+          </p:cNvPr>
+          <p:cNvPicPr>
+            <a:picLocks noChangeAspect="1"/>
+          </p:cNvPicPr>
+          <p:nvPr/>
+        </p:nvPicPr>
+        <p:blipFill>
+          <a:blip r:embed="rId2"/>
+          <a:srcRect l="164" t="21101" r="1878" b="18361"/>
+          <a:stretch>
+            <a:fillRect/>
+          </a:stretch>
+        </p:blipFill>
+        <p:spPr>
+          <a:xfrm>
+            <a:off x="2316000" y="854363"/>
+            <a:ext cx="7560000" cy="3574762"/>
+          </a:xfrm>
+          <a:prstGeom prst="rect">
+            <a:avLst/>
+          </a:prstGeom>
+        </p:spPr>
+      </p:pic>
+    </p:spTree>
+    <p:extLst>
+      <p:ext uri="{BB962C8B-B14F-4D97-AF65-F5344CB8AC3E}">
+        <p14:creationId xmlns:p14="http://schemas.microsoft.com/office/powerpoint/2010/main" val="1107477807"/>
       </p:ext>
     </p:extLst>
   </p:cSld>

--- a/スクリーンショット_コマンド.pptx
+++ b/スクリーンショット_コマンド.pptx
@@ -12,6 +12,7 @@
     <p:sldId id="265" r:id="rId6"/>
     <p:sldId id="266" r:id="rId7"/>
     <p:sldId id="267" r:id="rId8"/>
+    <p:sldId id="268" r:id="rId9"/>
   </p:sldIdLst>
   <p:sldSz cx="12192000" cy="6858000"/>
   <p:notesSz cx="6858000" cy="9144000"/>
@@ -1460,7 +1461,7 @@
           <a:p>
             <a:fld id="{04768167-0C55-4A67-A7A5-438788F12358}" type="datetimeFigureOut">
               <a:rPr kumimoji="1" lang="ja-JP" altLang="en-US" smtClean="0"/>
-              <a:t>2026/5/19</a:t>
+              <a:t>2026/5/22</a:t>
             </a:fld>
             <a:endParaRPr kumimoji="1" lang="ja-JP" altLang="en-US"/>
           </a:p>
@@ -1690,7 +1691,7 @@
           <a:p>
             <a:fld id="{04768167-0C55-4A67-A7A5-438788F12358}" type="datetimeFigureOut">
               <a:rPr kumimoji="1" lang="ja-JP" altLang="en-US" smtClean="0"/>
-              <a:t>2026/5/19</a:t>
+              <a:t>2026/5/22</a:t>
             </a:fld>
             <a:endParaRPr kumimoji="1" lang="ja-JP" altLang="en-US"/>
           </a:p>
@@ -1930,7 +1931,7 @@
           <a:p>
             <a:fld id="{04768167-0C55-4A67-A7A5-438788F12358}" type="datetimeFigureOut">
               <a:rPr kumimoji="1" lang="ja-JP" altLang="en-US" smtClean="0"/>
-              <a:t>2026/5/19</a:t>
+              <a:t>2026/5/22</a:t>
             </a:fld>
             <a:endParaRPr kumimoji="1" lang="ja-JP" altLang="en-US"/>
           </a:p>
@@ -2160,7 +2161,7 @@
           <a:p>
             <a:fld id="{04768167-0C55-4A67-A7A5-438788F12358}" type="datetimeFigureOut">
               <a:rPr kumimoji="1" lang="ja-JP" altLang="en-US" smtClean="0"/>
-              <a:t>2026/5/19</a:t>
+              <a:t>2026/5/22</a:t>
             </a:fld>
             <a:endParaRPr kumimoji="1" lang="ja-JP" altLang="en-US"/>
           </a:p>
@@ -2435,7 +2436,7 @@
           <a:p>
             <a:fld id="{04768167-0C55-4A67-A7A5-438788F12358}" type="datetimeFigureOut">
               <a:rPr kumimoji="1" lang="ja-JP" altLang="en-US" smtClean="0"/>
-              <a:t>2026/5/19</a:t>
+              <a:t>2026/5/22</a:t>
             </a:fld>
             <a:endParaRPr kumimoji="1" lang="ja-JP" altLang="en-US"/>
           </a:p>
@@ -2764,7 +2765,7 @@
           <a:p>
             <a:fld id="{04768167-0C55-4A67-A7A5-438788F12358}" type="datetimeFigureOut">
               <a:rPr kumimoji="1" lang="ja-JP" altLang="en-US" smtClean="0"/>
-              <a:t>2026/5/19</a:t>
+              <a:t>2026/5/22</a:t>
             </a:fld>
             <a:endParaRPr kumimoji="1" lang="ja-JP" altLang="en-US"/>
           </a:p>
@@ -3240,7 +3241,7 @@
           <a:p>
             <a:fld id="{04768167-0C55-4A67-A7A5-438788F12358}" type="datetimeFigureOut">
               <a:rPr kumimoji="1" lang="ja-JP" altLang="en-US" smtClean="0"/>
-              <a:t>2026/5/19</a:t>
+              <a:t>2026/5/22</a:t>
             </a:fld>
             <a:endParaRPr kumimoji="1" lang="ja-JP" altLang="en-US"/>
           </a:p>
@@ -3381,7 +3382,7 @@
           <a:p>
             <a:fld id="{04768167-0C55-4A67-A7A5-438788F12358}" type="datetimeFigureOut">
               <a:rPr kumimoji="1" lang="ja-JP" altLang="en-US" smtClean="0"/>
-              <a:t>2026/5/19</a:t>
+              <a:t>2026/5/22</a:t>
             </a:fld>
             <a:endParaRPr kumimoji="1" lang="ja-JP" altLang="en-US"/>
           </a:p>
@@ -3494,7 +3495,7 @@
           <a:p>
             <a:fld id="{04768167-0C55-4A67-A7A5-438788F12358}" type="datetimeFigureOut">
               <a:rPr kumimoji="1" lang="ja-JP" altLang="en-US" smtClean="0"/>
-              <a:t>2026/5/19</a:t>
+              <a:t>2026/5/22</a:t>
             </a:fld>
             <a:endParaRPr kumimoji="1" lang="ja-JP" altLang="en-US"/>
           </a:p>
@@ -3837,7 +3838,7 @@
           <a:p>
             <a:fld id="{04768167-0C55-4A67-A7A5-438788F12358}" type="datetimeFigureOut">
               <a:rPr kumimoji="1" lang="ja-JP" altLang="en-US" smtClean="0"/>
-              <a:t>2026/5/19</a:t>
+              <a:t>2026/5/22</a:t>
             </a:fld>
             <a:endParaRPr kumimoji="1" lang="ja-JP" altLang="en-US"/>
           </a:p>
@@ -4125,7 +4126,7 @@
           <a:p>
             <a:fld id="{04768167-0C55-4A67-A7A5-438788F12358}" type="datetimeFigureOut">
               <a:rPr kumimoji="1" lang="ja-JP" altLang="en-US" smtClean="0"/>
-              <a:t>2026/5/19</a:t>
+              <a:t>2026/5/22</a:t>
             </a:fld>
             <a:endParaRPr kumimoji="1" lang="ja-JP" altLang="en-US"/>
           </a:p>
@@ -4398,7 +4399,7 @@
           <a:p>
             <a:fld id="{04768167-0C55-4A67-A7A5-438788F12358}" type="datetimeFigureOut">
               <a:rPr kumimoji="1" lang="ja-JP" altLang="en-US" smtClean="0"/>
-              <a:t>2026/5/19</a:t>
+              <a:t>2026/5/22</a:t>
             </a:fld>
             <a:endParaRPr kumimoji="1" lang="ja-JP" altLang="en-US"/>
           </a:p>
@@ -6229,6 +6230,126 @@
 </p:sld>
 </file>
 
+<file path=ppt/slides/slide8.xml><?xml version="1.0" encoding="utf-8"?>
+<p:sld xmlns:a="http://schemas.openxmlformats.org/drawingml/2006/main" xmlns:r="http://schemas.openxmlformats.org/officeDocument/2006/relationships" xmlns:p="http://schemas.openxmlformats.org/presentationml/2006/main">
+  <p:cSld>
+    <p:spTree>
+      <p:nvGrpSpPr>
+        <p:cNvPr id="1" name=""/>
+        <p:cNvGrpSpPr/>
+        <p:nvPr/>
+      </p:nvGrpSpPr>
+      <p:grpSpPr>
+        <a:xfrm>
+          <a:off x="0" y="0"/>
+          <a:ext cx="0" cy="0"/>
+          <a:chOff x="0" y="0"/>
+          <a:chExt cx="0" cy="0"/>
+        </a:xfrm>
+      </p:grpSpPr>
+      <p:grpSp>
+        <p:nvGrpSpPr>
+          <p:cNvPr id="4" name="グループ化 3">
+            <a:extLst>
+              <a:ext uri="{FF2B5EF4-FFF2-40B4-BE49-F238E27FC236}">
+                <a16:creationId xmlns:a16="http://schemas.microsoft.com/office/drawing/2014/main" id="{DA0C67AB-ADBB-B454-51C3-BE3CA6CD38D2}"/>
+              </a:ext>
+            </a:extLst>
+          </p:cNvPr>
+          <p:cNvGrpSpPr/>
+          <p:nvPr/>
+        </p:nvGrpSpPr>
+        <p:grpSpPr>
+          <a:xfrm>
+            <a:off x="1126851" y="1103440"/>
+            <a:ext cx="7563906" cy="5363323"/>
+            <a:chOff x="980547" y="-432752"/>
+            <a:chExt cx="7563906" cy="5363323"/>
+          </a:xfrm>
+        </p:grpSpPr>
+        <p:pic>
+          <p:nvPicPr>
+            <p:cNvPr id="5" name="図 4">
+              <a:extLst>
+                <a:ext uri="{FF2B5EF4-FFF2-40B4-BE49-F238E27FC236}">
+                  <a16:creationId xmlns:a16="http://schemas.microsoft.com/office/drawing/2014/main" id="{8A87757A-F186-89D9-2D35-5557D5D7C374}"/>
+                </a:ext>
+              </a:extLst>
+            </p:cNvPr>
+            <p:cNvPicPr>
+              <a:picLocks noChangeAspect="1"/>
+            </p:cNvPicPr>
+            <p:nvPr/>
+          </p:nvPicPr>
+          <p:blipFill>
+            <a:blip r:embed="rId2">
+              <a:extLst>
+                <a:ext uri="{28A0092B-C50C-407E-A947-70E740481C1C}">
+                  <a14:useLocalDpi xmlns:a14="http://schemas.microsoft.com/office/drawing/2010/main" val="0"/>
+                </a:ext>
+              </a:extLst>
+            </a:blip>
+            <a:stretch>
+              <a:fillRect/>
+            </a:stretch>
+          </p:blipFill>
+          <p:spPr>
+            <a:xfrm>
+              <a:off x="980547" y="-432752"/>
+              <a:ext cx="7563906" cy="5363323"/>
+            </a:xfrm>
+            <a:prstGeom prst="rect">
+              <a:avLst/>
+            </a:prstGeom>
+          </p:spPr>
+        </p:pic>
+        <p:pic>
+          <p:nvPicPr>
+            <p:cNvPr id="6" name="図 5">
+              <a:extLst>
+                <a:ext uri="{FF2B5EF4-FFF2-40B4-BE49-F238E27FC236}">
+                  <a16:creationId xmlns:a16="http://schemas.microsoft.com/office/drawing/2014/main" id="{7A137657-55D7-B099-EDE0-2D265E4AAE74}"/>
+                </a:ext>
+              </a:extLst>
+            </p:cNvPr>
+            <p:cNvPicPr>
+              <a:picLocks noChangeAspect="1"/>
+            </p:cNvPicPr>
+            <p:nvPr/>
+          </p:nvPicPr>
+          <p:blipFill>
+            <a:blip r:embed="rId3">
+              <a:alphaModFix/>
+            </a:blip>
+            <a:srcRect l="8419" t="26109" r="32126" b="23125"/>
+            <a:stretch>
+              <a:fillRect/>
+            </a:stretch>
+          </p:blipFill>
+          <p:spPr>
+            <a:xfrm>
+              <a:off x="1424939" y="1775460"/>
+              <a:ext cx="4899661" cy="1257300"/>
+            </a:xfrm>
+            <a:prstGeom prst="rect">
+              <a:avLst/>
+            </a:prstGeom>
+          </p:spPr>
+        </p:pic>
+      </p:grpSp>
+    </p:spTree>
+    <p:extLst>
+      <p:ext uri="{BB962C8B-B14F-4D97-AF65-F5344CB8AC3E}">
+        <p14:creationId xmlns:p14="http://schemas.microsoft.com/office/powerpoint/2010/main" val="529046200"/>
+      </p:ext>
+    </p:extLst>
+  </p:cSld>
+  <p:clrMapOvr>
+    <a:masterClrMapping/>
+  </p:clrMapOvr>
+</p:sld>
+</file>
+
 <file path=ppt/theme/theme1.xml><?xml version="1.0" encoding="utf-8"?>
 <a:theme xmlns:a="http://schemas.openxmlformats.org/drawingml/2006/main" name="Office テーマ">
   <a:themeElements>
